--- a/thuyết trình.pptx
+++ b/thuyết trình.pptx
@@ -6,45 +6,46 @@
   </p:sldMasterIdLst>
   <p:sldIdLst>
     <p:sldId id="256" r:id="rId2"/>
-    <p:sldId id="265" r:id="rId3"/>
-    <p:sldId id="257" r:id="rId4"/>
-    <p:sldId id="259" r:id="rId5"/>
-    <p:sldId id="258" r:id="rId6"/>
-    <p:sldId id="263" r:id="rId7"/>
-    <p:sldId id="269" r:id="rId8"/>
-    <p:sldId id="266" r:id="rId9"/>
-    <p:sldId id="267" r:id="rId10"/>
-    <p:sldId id="268" r:id="rId11"/>
-    <p:sldId id="261" r:id="rId12"/>
+    <p:sldId id="272" r:id="rId3"/>
+    <p:sldId id="259" r:id="rId4"/>
+    <p:sldId id="270" r:id="rId5"/>
+    <p:sldId id="271" r:id="rId6"/>
+    <p:sldId id="269" r:id="rId7"/>
+    <p:sldId id="261" r:id="rId8"/>
+    <p:sldId id="258" r:id="rId9"/>
+    <p:sldId id="263" r:id="rId10"/>
+    <p:sldId id="266" r:id="rId11"/>
+    <p:sldId id="267" r:id="rId12"/>
+    <p:sldId id="268" r:id="rId13"/>
   </p:sldIdLst>
   <p:sldSz cx="12192000" cy="6858000"/>
   <p:notesSz cx="6858000" cy="9144000"/>
   <p:embeddedFontLst>
     <p:embeddedFont>
       <p:font typeface="Barlow" panose="00000500000000000000" pitchFamily="2" charset="0"/>
-      <p:regular r:id="rId13"/>
-      <p:bold r:id="rId14"/>
-      <p:italic r:id="rId15"/>
-      <p:boldItalic r:id="rId16"/>
+      <p:regular r:id="rId14"/>
+      <p:bold r:id="rId15"/>
+      <p:italic r:id="rId16"/>
+      <p:boldItalic r:id="rId17"/>
     </p:embeddedFont>
     <p:embeddedFont>
       <p:font typeface="Calibri" panose="020F0502020204030204" pitchFamily="34" charset="0"/>
-      <p:regular r:id="rId17"/>
-      <p:bold r:id="rId18"/>
-      <p:italic r:id="rId19"/>
-      <p:boldItalic r:id="rId20"/>
+      <p:regular r:id="rId18"/>
+      <p:bold r:id="rId19"/>
+      <p:italic r:id="rId20"/>
+      <p:boldItalic r:id="rId21"/>
     </p:embeddedFont>
     <p:embeddedFont>
       <p:font typeface="K2D" panose="020B0604020202020204" charset="-34"/>
-      <p:regular r:id="rId21"/>
-      <p:bold r:id="rId22"/>
-      <p:italic r:id="rId23"/>
-      <p:boldItalic r:id="rId24"/>
+      <p:regular r:id="rId22"/>
+      <p:bold r:id="rId23"/>
+      <p:italic r:id="rId24"/>
+      <p:boldItalic r:id="rId25"/>
     </p:embeddedFont>
     <p:embeddedFont>
       <p:font typeface="Readex Pro" panose="020B0604020202020204" charset="-78"/>
-      <p:regular r:id="rId25"/>
-      <p:bold r:id="rId26"/>
+      <p:regular r:id="rId26"/>
+      <p:bold r:id="rId27"/>
     </p:embeddedFont>
   </p:embeddedFontLst>
   <p:defaultTextStyle>
@@ -1075,7 +1076,7 @@
             <a:fld id="{D86B3AB3-BDCC-41BF-8781-963E853753C3}" type="datetime1">
               <a:rPr lang="en-US" smtClean="0"/>
               <a:pPr/>
-              <a:t>8/18/2026</a:t>
+              <a:t>8/19/2026</a:t>
             </a:fld>
             <a:endParaRPr lang="en-US"/>
           </a:p>
@@ -2487,7 +2488,7 @@
             <a:fld id="{D86B3AB3-BDCC-41BF-8781-963E853753C3}" type="datetime1">
               <a:rPr lang="en-US" smtClean="0"/>
               <a:pPr/>
-              <a:t>8/18/2026</a:t>
+              <a:t>8/19/2026</a:t>
             </a:fld>
             <a:endParaRPr lang="en-US"/>
           </a:p>
@@ -3729,7 +3730,7 @@
             <a:fld id="{D86B3AB3-BDCC-41BF-8781-963E853753C3}" type="datetime1">
               <a:rPr lang="en-US" smtClean="0"/>
               <a:pPr/>
-              <a:t>8/18/2026</a:t>
+              <a:t>8/19/2026</a:t>
             </a:fld>
             <a:endParaRPr lang="en-US"/>
           </a:p>
@@ -4963,7 +4964,7 @@
             <a:fld id="{D86B3AB3-BDCC-41BF-8781-963E853753C3}" type="datetime1">
               <a:rPr lang="en-US" smtClean="0"/>
               <a:pPr/>
-              <a:t>8/18/2026</a:t>
+              <a:t>8/19/2026</a:t>
             </a:fld>
             <a:endParaRPr lang="en-US"/>
           </a:p>
@@ -6085,7 +6086,7 @@
             <a:fld id="{D86B3AB3-BDCC-41BF-8781-963E853753C3}" type="datetime1">
               <a:rPr lang="en-US" smtClean="0"/>
               <a:pPr/>
-              <a:t>8/18/2026</a:t>
+              <a:t>8/19/2026</a:t>
             </a:fld>
             <a:endParaRPr lang="en-US"/>
           </a:p>
@@ -7207,7 +7208,7 @@
             <a:fld id="{D86B3AB3-BDCC-41BF-8781-963E853753C3}" type="datetime1">
               <a:rPr lang="en-US" smtClean="0"/>
               <a:pPr/>
-              <a:t>8/18/2026</a:t>
+              <a:t>8/19/2026</a:t>
             </a:fld>
             <a:endParaRPr lang="en-US"/>
           </a:p>
@@ -8347,7 +8348,7 @@
             <a:fld id="{D86B3AB3-BDCC-41BF-8781-963E853753C3}" type="datetime1">
               <a:rPr lang="en-US" smtClean="0"/>
               <a:pPr/>
-              <a:t>8/18/2026</a:t>
+              <a:t>8/19/2026</a:t>
             </a:fld>
             <a:endParaRPr lang="en-US"/>
           </a:p>
@@ -9519,7 +9520,7 @@
             <a:fld id="{D86B3AB3-BDCC-41BF-8781-963E853753C3}" type="datetime1">
               <a:rPr lang="en-US" smtClean="0"/>
               <a:pPr/>
-              <a:t>8/18/2026</a:t>
+              <a:t>8/19/2026</a:t>
             </a:fld>
             <a:endParaRPr lang="en-US"/>
           </a:p>
@@ -10564,7 +10565,7 @@
             <a:fld id="{D86B3AB3-BDCC-41BF-8781-963E853753C3}" type="datetime1">
               <a:rPr lang="en-US" smtClean="0"/>
               <a:pPr/>
-              <a:t>8/18/2026</a:t>
+              <a:t>8/19/2026</a:t>
             </a:fld>
             <a:endParaRPr lang="en-US"/>
           </a:p>
@@ -12097,7 +12098,7 @@
             <a:fld id="{D86B3AB3-BDCC-41BF-8781-963E853753C3}" type="datetime1">
               <a:rPr lang="en-US" smtClean="0"/>
               <a:pPr/>
-              <a:t>8/18/2026</a:t>
+              <a:t>8/19/2026</a:t>
             </a:fld>
             <a:endParaRPr lang="en-US"/>
           </a:p>
@@ -13379,7 +13380,7 @@
             <a:fld id="{D86B3AB3-BDCC-41BF-8781-963E853753C3}" type="datetime1">
               <a:rPr lang="en-US" smtClean="0"/>
               <a:pPr/>
-              <a:t>8/18/2026</a:t>
+              <a:t>8/19/2026</a:t>
             </a:fld>
             <a:endParaRPr lang="en-US"/>
           </a:p>
@@ -14203,7 +14204,7 @@
             <a:fld id="{D86B3AB3-BDCC-41BF-8781-963E853753C3}" type="datetime1">
               <a:rPr lang="en-US" smtClean="0"/>
               <a:pPr/>
-              <a:t>8/18/2026</a:t>
+              <a:t>8/19/2026</a:t>
             </a:fld>
             <a:endParaRPr lang="en-US"/>
           </a:p>
@@ -15521,7 +15522,7 @@
             <a:fld id="{D86B3AB3-BDCC-41BF-8781-963E853753C3}" type="datetime1">
               <a:rPr lang="en-US" smtClean="0"/>
               <a:pPr/>
-              <a:t>8/18/2026</a:t>
+              <a:t>8/19/2026</a:t>
             </a:fld>
             <a:endParaRPr lang="en-US"/>
           </a:p>
@@ -16473,7 +16474,7 @@
             <a:fld id="{D86B3AB3-BDCC-41BF-8781-963E853753C3}" type="datetime1">
               <a:rPr lang="en-US" smtClean="0"/>
               <a:pPr/>
-              <a:t>8/18/2026</a:t>
+              <a:t>8/19/2026</a:t>
             </a:fld>
             <a:endParaRPr lang="en-US"/>
           </a:p>
@@ -17313,7 +17314,7 @@
             <a:fld id="{D86B3AB3-BDCC-41BF-8781-963E853753C3}" type="datetime1">
               <a:rPr lang="en-US" smtClean="0"/>
               <a:pPr/>
-              <a:t>8/18/2026</a:t>
+              <a:t>8/19/2026</a:t>
             </a:fld>
             <a:endParaRPr lang="en-US"/>
           </a:p>
@@ -18173,7 +18174,7 @@
             <a:fld id="{D86B3AB3-BDCC-41BF-8781-963E853753C3}" type="datetime1">
               <a:rPr lang="en-US" smtClean="0"/>
               <a:pPr/>
-              <a:t>8/18/2026</a:t>
+              <a:t>8/19/2026</a:t>
             </a:fld>
             <a:endParaRPr lang="en-US"/>
           </a:p>
@@ -18597,7 +18598,7 @@
             <a:fld id="{D86B3AB3-BDCC-41BF-8781-963E853753C3}" type="datetime1">
               <a:rPr lang="en-US" smtClean="0"/>
               <a:pPr/>
-              <a:t>8/18/2026</a:t>
+              <a:t>8/19/2026</a:t>
             </a:fld>
             <a:endParaRPr lang="en-US"/>
           </a:p>
@@ -19907,7 +19908,7 @@
             <a:fld id="{D86B3AB3-BDCC-41BF-8781-963E853753C3}" type="datetime1">
               <a:rPr lang="en-US" smtClean="0"/>
               <a:pPr/>
-              <a:t>8/18/2026</a:t>
+              <a:t>8/19/2026</a:t>
             </a:fld>
             <a:endParaRPr lang="en-US"/>
           </a:p>
@@ -23018,7 +23019,7 @@
             <a:fld id="{D86B3AB3-BDCC-41BF-8781-963E853753C3}" type="datetime1">
               <a:rPr lang="en-US" smtClean="0"/>
               <a:pPr/>
-              <a:t>8/18/2026</a:t>
+              <a:t>8/19/2026</a:t>
             </a:fld>
             <a:endParaRPr lang="en-US"/>
           </a:p>
@@ -26287,7 +26288,7 @@
             <a:fld id="{D86B3AB3-BDCC-41BF-8781-963E853753C3}" type="datetime1">
               <a:rPr lang="en-US" smtClean="0"/>
               <a:pPr/>
-              <a:t>8/18/2026</a:t>
+              <a:t>8/19/2026</a:t>
             </a:fld>
             <a:endParaRPr lang="en-US"/>
           </a:p>
@@ -27442,7 +27443,7 @@
             <a:fld id="{D86B3AB3-BDCC-41BF-8781-963E853753C3}" type="datetime1">
               <a:rPr lang="en-US" smtClean="0"/>
               <a:pPr/>
-              <a:t>8/18/2026</a:t>
+              <a:t>8/19/2026</a:t>
             </a:fld>
             <a:endParaRPr lang="en-US"/>
           </a:p>
@@ -28571,7 +28572,7 @@
             <a:fld id="{D86B3AB3-BDCC-41BF-8781-963E853753C3}" type="datetime1">
               <a:rPr lang="en-US" smtClean="0"/>
               <a:pPr/>
-              <a:t>8/18/2026</a:t>
+              <a:t>8/19/2026</a:t>
             </a:fld>
             <a:endParaRPr lang="en-US"/>
           </a:p>
@@ -32027,7 +32028,7 @@
             <a:fld id="{D86B3AB3-BDCC-41BF-8781-963E853753C3}" type="datetime1">
               <a:rPr lang="en-US" smtClean="0"/>
               <a:pPr/>
-              <a:t>8/18/2026</a:t>
+              <a:t>8/19/2026</a:t>
             </a:fld>
             <a:endParaRPr lang="en-US"/>
           </a:p>
@@ -33350,7 +33351,7 @@
             <a:fld id="{D86B3AB3-BDCC-41BF-8781-963E853753C3}" type="datetime1">
               <a:rPr lang="en-US" smtClean="0"/>
               <a:pPr/>
-              <a:t>8/18/2026</a:t>
+              <a:t>8/19/2026</a:t>
             </a:fld>
             <a:endParaRPr lang="en-US"/>
           </a:p>
@@ -34566,7 +34567,7 @@
             <a:fld id="{D86B3AB3-BDCC-41BF-8781-963E853753C3}" type="datetime1">
               <a:rPr lang="en-US" smtClean="0"/>
               <a:pPr/>
-              <a:t>8/18/2026</a:t>
+              <a:t>8/19/2026</a:t>
             </a:fld>
             <a:endParaRPr lang="en-US"/>
           </a:p>
@@ -35631,7 +35632,7 @@
             <a:fld id="{D86B3AB3-BDCC-41BF-8781-963E853753C3}" type="datetime1">
               <a:rPr lang="en-US" smtClean="0"/>
               <a:pPr/>
-              <a:t>8/18/2026</a:t>
+              <a:t>8/19/2026</a:t>
             </a:fld>
             <a:endParaRPr lang="en-US"/>
           </a:p>
@@ -36642,7 +36643,7 @@
             <a:fld id="{D86B3AB3-BDCC-41BF-8781-963E853753C3}" type="datetime1">
               <a:rPr lang="en-US" smtClean="0"/>
               <a:pPr/>
-              <a:t>8/18/2026</a:t>
+              <a:t>8/19/2026</a:t>
             </a:fld>
             <a:endParaRPr lang="en-US"/>
           </a:p>
@@ -37686,7 +37687,7 @@
             <a:fld id="{D86B3AB3-BDCC-41BF-8781-963E853753C3}" type="datetime1">
               <a:rPr lang="en-US" smtClean="0"/>
               <a:pPr/>
-              <a:t>8/18/2026</a:t>
+              <a:t>8/19/2026</a:t>
             </a:fld>
             <a:endParaRPr lang="en-US"/>
           </a:p>
@@ -38824,7 +38825,7 @@
             <a:fld id="{D86B3AB3-BDCC-41BF-8781-963E853753C3}" type="datetime1">
               <a:rPr lang="en-US" smtClean="0"/>
               <a:pPr/>
-              <a:t>8/18/2026</a:t>
+              <a:t>8/19/2026</a:t>
             </a:fld>
             <a:endParaRPr lang="en-US"/>
           </a:p>
@@ -39215,7 +39216,7 @@
             <a:fld id="{00D1CE85-AA59-46D7-98F4-301D80B40614}" type="datetimeFigureOut">
               <a:rPr lang="en-US" smtClean="0"/>
               <a:pPr/>
-              <a:t>8/18/2026</a:t>
+              <a:t>8/19/2026</a:t>
             </a:fld>
             <a:endParaRPr lang="en-US"/>
           </a:p>
@@ -39690,7 +39691,10 @@
           <a:bodyPr/>
           <a:lstStyle/>
           <a:p>
-            <a:endParaRPr lang="en-US"/>
+            <a:r>
+              <a:rPr lang="en-US" dirty="0"/>
+              <a:t>Fraud detection</a:t>
+            </a:r>
           </a:p>
         </p:txBody>
       </p:sp>
@@ -39715,7 +39719,10 @@
           <a:bodyPr/>
           <a:lstStyle/>
           <a:p>
-            <a:endParaRPr lang="en-US"/>
+            <a:r>
+              <a:rPr lang="en-US" dirty="0"/>
+              <a:t>Trần Phước Tài</a:t>
+            </a:r>
           </a:p>
         </p:txBody>
       </p:sp>
@@ -39733,6 +39740,216 @@
 </file>
 
 <file path=ppt/slides/slide10.xml><?xml version="1.0" encoding="utf-8"?>
+<p:sld xmlns:a="http://schemas.openxmlformats.org/drawingml/2006/main" xmlns:r="http://schemas.openxmlformats.org/officeDocument/2006/relationships" xmlns:p="http://schemas.openxmlformats.org/presentationml/2006/main">
+  <p:cSld>
+    <p:spTree>
+      <p:nvGrpSpPr>
+        <p:cNvPr id="1" name=""/>
+        <p:cNvGrpSpPr/>
+        <p:nvPr/>
+      </p:nvGrpSpPr>
+      <p:grpSpPr>
+        <a:xfrm>
+          <a:off x="0" y="0"/>
+          <a:ext cx="0" cy="0"/>
+          <a:chOff x="0" y="0"/>
+          <a:chExt cx="0" cy="0"/>
+        </a:xfrm>
+      </p:grpSpPr>
+      <p:sp>
+        <p:nvSpPr>
+          <p:cNvPr id="2" name="Picture Placeholder 1">
+            <a:extLst>
+              <a:ext uri="{FF2B5EF4-FFF2-40B4-BE49-F238E27FC236}">
+                <a16:creationId xmlns:a16="http://schemas.microsoft.com/office/drawing/2014/main" id="{B309368D-80CF-13C8-01DF-AC8188BD7C87}"/>
+              </a:ext>
+            </a:extLst>
+          </p:cNvPr>
+          <p:cNvSpPr>
+            <a:spLocks noGrp="1"/>
+          </p:cNvSpPr>
+          <p:nvPr>
+            <p:ph type="pic" sz="quarter" idx="12"/>
+          </p:nvPr>
+        </p:nvSpPr>
+        <p:spPr/>
+        <p:txBody>
+          <a:bodyPr/>
+          <a:lstStyle/>
+          <a:p>
+            <a:endParaRPr lang="en-US"/>
+          </a:p>
+        </p:txBody>
+      </p:sp>
+      <p:sp>
+        <p:nvSpPr>
+          <p:cNvPr id="3" name="Title 2">
+            <a:extLst>
+              <a:ext uri="{FF2B5EF4-FFF2-40B4-BE49-F238E27FC236}">
+                <a16:creationId xmlns:a16="http://schemas.microsoft.com/office/drawing/2014/main" id="{A904581F-8973-0C84-291E-542AFB439C4F}"/>
+              </a:ext>
+            </a:extLst>
+          </p:cNvPr>
+          <p:cNvSpPr>
+            <a:spLocks noGrp="1"/>
+          </p:cNvSpPr>
+          <p:nvPr>
+            <p:ph type="ctrTitle"/>
+          </p:nvPr>
+        </p:nvSpPr>
+        <p:spPr/>
+        <p:txBody>
+          <a:bodyPr/>
+          <a:lstStyle/>
+          <a:p>
+            <a:endParaRPr lang="en-US"/>
+          </a:p>
+        </p:txBody>
+      </p:sp>
+      <p:sp>
+        <p:nvSpPr>
+          <p:cNvPr id="4" name="Subtitle 3">
+            <a:extLst>
+              <a:ext uri="{FF2B5EF4-FFF2-40B4-BE49-F238E27FC236}">
+                <a16:creationId xmlns:a16="http://schemas.microsoft.com/office/drawing/2014/main" id="{064DBEAB-3C67-BC6D-B59C-AC9B97F5F3EF}"/>
+              </a:ext>
+            </a:extLst>
+          </p:cNvPr>
+          <p:cNvSpPr>
+            <a:spLocks noGrp="1"/>
+          </p:cNvSpPr>
+          <p:nvPr>
+            <p:ph type="subTitle" idx="1"/>
+          </p:nvPr>
+        </p:nvSpPr>
+        <p:spPr/>
+        <p:txBody>
+          <a:bodyPr/>
+          <a:lstStyle/>
+          <a:p>
+            <a:endParaRPr lang="en-US"/>
+          </a:p>
+        </p:txBody>
+      </p:sp>
+    </p:spTree>
+    <p:extLst>
+      <p:ext uri="{BB962C8B-B14F-4D97-AF65-F5344CB8AC3E}">
+        <p14:creationId xmlns:p14="http://schemas.microsoft.com/office/powerpoint/2010/main" val="2903526848"/>
+      </p:ext>
+    </p:extLst>
+  </p:cSld>
+  <p:clrMapOvr>
+    <a:masterClrMapping/>
+  </p:clrMapOvr>
+</p:sld>
+</file>
+
+<file path=ppt/slides/slide11.xml><?xml version="1.0" encoding="utf-8"?>
+<p:sld xmlns:a="http://schemas.openxmlformats.org/drawingml/2006/main" xmlns:r="http://schemas.openxmlformats.org/officeDocument/2006/relationships" xmlns:p="http://schemas.openxmlformats.org/presentationml/2006/main">
+  <p:cSld>
+    <p:spTree>
+      <p:nvGrpSpPr>
+        <p:cNvPr id="1" name=""/>
+        <p:cNvGrpSpPr/>
+        <p:nvPr/>
+      </p:nvGrpSpPr>
+      <p:grpSpPr>
+        <a:xfrm>
+          <a:off x="0" y="0"/>
+          <a:ext cx="0" cy="0"/>
+          <a:chOff x="0" y="0"/>
+          <a:chExt cx="0" cy="0"/>
+        </a:xfrm>
+      </p:grpSpPr>
+      <p:sp>
+        <p:nvSpPr>
+          <p:cNvPr id="2" name="Title 1">
+            <a:extLst>
+              <a:ext uri="{FF2B5EF4-FFF2-40B4-BE49-F238E27FC236}">
+                <a16:creationId xmlns:a16="http://schemas.microsoft.com/office/drawing/2014/main" id="{E47F9D08-0D5F-1827-1F0A-67420FD2E196}"/>
+              </a:ext>
+            </a:extLst>
+          </p:cNvPr>
+          <p:cNvSpPr>
+            <a:spLocks noGrp="1"/>
+          </p:cNvSpPr>
+          <p:nvPr>
+            <p:ph type="ctrTitle"/>
+          </p:nvPr>
+        </p:nvSpPr>
+        <p:spPr/>
+        <p:txBody>
+          <a:bodyPr/>
+          <a:lstStyle/>
+          <a:p>
+            <a:endParaRPr lang="en-US"/>
+          </a:p>
+        </p:txBody>
+      </p:sp>
+      <p:sp>
+        <p:nvSpPr>
+          <p:cNvPr id="3" name="Subtitle 2">
+            <a:extLst>
+              <a:ext uri="{FF2B5EF4-FFF2-40B4-BE49-F238E27FC236}">
+                <a16:creationId xmlns:a16="http://schemas.microsoft.com/office/drawing/2014/main" id="{326F5F39-C814-49EB-D5B3-097B436AD3E7}"/>
+              </a:ext>
+            </a:extLst>
+          </p:cNvPr>
+          <p:cNvSpPr>
+            <a:spLocks noGrp="1"/>
+          </p:cNvSpPr>
+          <p:nvPr>
+            <p:ph type="subTitle" idx="1"/>
+          </p:nvPr>
+        </p:nvSpPr>
+        <p:spPr/>
+        <p:txBody>
+          <a:bodyPr/>
+          <a:lstStyle/>
+          <a:p>
+            <a:endParaRPr lang="en-US"/>
+          </a:p>
+        </p:txBody>
+      </p:sp>
+      <p:sp>
+        <p:nvSpPr>
+          <p:cNvPr id="4" name="Picture Placeholder 3">
+            <a:extLst>
+              <a:ext uri="{FF2B5EF4-FFF2-40B4-BE49-F238E27FC236}">
+                <a16:creationId xmlns:a16="http://schemas.microsoft.com/office/drawing/2014/main" id="{06D78226-E86C-748B-C52C-76AC0CAE9D16}"/>
+              </a:ext>
+            </a:extLst>
+          </p:cNvPr>
+          <p:cNvSpPr>
+            <a:spLocks noGrp="1"/>
+          </p:cNvSpPr>
+          <p:nvPr>
+            <p:ph type="pic" sz="quarter" idx="12"/>
+          </p:nvPr>
+        </p:nvSpPr>
+        <p:spPr/>
+        <p:txBody>
+          <a:bodyPr/>
+          <a:lstStyle/>
+          <a:p>
+            <a:endParaRPr lang="en-US"/>
+          </a:p>
+        </p:txBody>
+      </p:sp>
+    </p:spTree>
+    <p:extLst>
+      <p:ext uri="{BB962C8B-B14F-4D97-AF65-F5344CB8AC3E}">
+        <p14:creationId xmlns:p14="http://schemas.microsoft.com/office/powerpoint/2010/main" val="3562301540"/>
+      </p:ext>
+    </p:extLst>
+  </p:cSld>
+  <p:clrMapOvr>
+    <a:masterClrMapping/>
+  </p:clrMapOvr>
+</p:sld>
+</file>
+
+<file path=ppt/slides/slide12.xml><?xml version="1.0" encoding="utf-8"?>
 <p:sld xmlns:a="http://schemas.openxmlformats.org/drawingml/2006/main" xmlns:r="http://schemas.openxmlformats.org/officeDocument/2006/relationships" xmlns:p="http://schemas.openxmlformats.org/presentationml/2006/main">
   <p:cSld>
     <p:spTree>
@@ -39887,92 +40104,6 @@
 </p:sld>
 </file>
 
-<file path=ppt/slides/slide11.xml><?xml version="1.0" encoding="utf-8"?>
-<p:sld xmlns:a="http://schemas.openxmlformats.org/drawingml/2006/main" xmlns:r="http://schemas.openxmlformats.org/officeDocument/2006/relationships" xmlns:p="http://schemas.openxmlformats.org/presentationml/2006/main">
-  <p:cSld>
-    <p:spTree>
-      <p:nvGrpSpPr>
-        <p:cNvPr id="1" name=""/>
-        <p:cNvGrpSpPr/>
-        <p:nvPr/>
-      </p:nvGrpSpPr>
-      <p:grpSpPr>
-        <a:xfrm>
-          <a:off x="0" y="0"/>
-          <a:ext cx="0" cy="0"/>
-          <a:chOff x="0" y="0"/>
-          <a:chExt cx="0" cy="0"/>
-        </a:xfrm>
-      </p:grpSpPr>
-      <p:sp>
-        <p:nvSpPr>
-          <p:cNvPr id="2" name="Title 1">
-            <a:extLst>
-              <a:ext uri="{FF2B5EF4-FFF2-40B4-BE49-F238E27FC236}">
-                <a16:creationId xmlns:a16="http://schemas.microsoft.com/office/drawing/2014/main" id="{6727981F-8DDB-4942-9095-1A301A93096A}"/>
-              </a:ext>
-            </a:extLst>
-          </p:cNvPr>
-          <p:cNvSpPr>
-            <a:spLocks noGrp="1"/>
-          </p:cNvSpPr>
-          <p:nvPr>
-            <p:ph type="ctrTitle"/>
-          </p:nvPr>
-        </p:nvSpPr>
-        <p:spPr/>
-        <p:txBody>
-          <a:bodyPr/>
-          <a:lstStyle/>
-          <a:p>
-            <a:r>
-              <a:rPr lang="en-US"/>
-              <a:t>CÁM ƠN</a:t>
-            </a:r>
-          </a:p>
-        </p:txBody>
-      </p:sp>
-      <p:sp>
-        <p:nvSpPr>
-          <p:cNvPr id="3" name="Subtitle 2">
-            <a:extLst>
-              <a:ext uri="{FF2B5EF4-FFF2-40B4-BE49-F238E27FC236}">
-                <a16:creationId xmlns:a16="http://schemas.microsoft.com/office/drawing/2014/main" id="{E3DE8CBC-CC0F-41DD-9762-03FD26D3B012}"/>
-              </a:ext>
-            </a:extLst>
-          </p:cNvPr>
-          <p:cNvSpPr>
-            <a:spLocks noGrp="1"/>
-          </p:cNvSpPr>
-          <p:nvPr>
-            <p:ph type="subTitle" idx="1"/>
-          </p:nvPr>
-        </p:nvSpPr>
-        <p:spPr/>
-        <p:txBody>
-          <a:bodyPr/>
-          <a:lstStyle/>
-          <a:p>
-            <a:r>
-              <a:rPr lang="en-US"/>
-              <a:t>Thank you</a:t>
-            </a:r>
-          </a:p>
-        </p:txBody>
-      </p:sp>
-    </p:spTree>
-    <p:extLst>
-      <p:ext uri="{BB962C8B-B14F-4D97-AF65-F5344CB8AC3E}">
-        <p14:creationId xmlns:p14="http://schemas.microsoft.com/office/powerpoint/2010/main" val="131648227"/>
-      </p:ext>
-    </p:extLst>
-  </p:cSld>
-  <p:clrMapOvr>
-    <a:masterClrMapping/>
-  </p:clrMapOvr>
-</p:sld>
-</file>
-
 <file path=ppt/slides/slide2.xml><?xml version="1.0" encoding="utf-8"?>
 <p:sld xmlns:a="http://schemas.openxmlformats.org/drawingml/2006/main" xmlns:r="http://schemas.openxmlformats.org/officeDocument/2006/relationships" xmlns:p="http://schemas.openxmlformats.org/presentationml/2006/main">
   <p:cSld>
@@ -39995,7 +40126,7 @@
           <p:cNvPr id="2" name="Title 1">
             <a:extLst>
               <a:ext uri="{FF2B5EF4-FFF2-40B4-BE49-F238E27FC236}">
-                <a16:creationId xmlns:a16="http://schemas.microsoft.com/office/drawing/2014/main" id="{5CB59C82-E165-4291-296C-0B6D296854DE}"/>
+                <a16:creationId xmlns:a16="http://schemas.microsoft.com/office/drawing/2014/main" id="{14E1C98C-59A6-490B-83BD-EE1E10A5BA9A}"/>
               </a:ext>
             </a:extLst>
           </p:cNvPr>
@@ -40003,7 +40134,7 @@
             <a:spLocks noGrp="1"/>
           </p:cNvSpPr>
           <p:nvPr>
-            <p:ph type="ctrTitle"/>
+            <p:ph type="title"/>
           </p:nvPr>
         </p:nvSpPr>
         <p:spPr/>
@@ -40011,16 +40142,44 @@
           <a:bodyPr/>
           <a:lstStyle/>
           <a:p>
-            <a:endParaRPr lang="en-US"/>
+            <a:r>
+              <a:rPr lang="en-US" dirty="0" err="1"/>
+              <a:t>Công</a:t>
+            </a:r>
+            <a:r>
+              <a:rPr lang="en-US" dirty="0"/>
+              <a:t> </a:t>
+            </a:r>
+            <a:r>
+              <a:rPr lang="en-US" dirty="0" err="1"/>
+              <a:t>nghệ</a:t>
+            </a:r>
+            <a:r>
+              <a:rPr lang="en-US" dirty="0"/>
+              <a:t> </a:t>
+            </a:r>
+            <a:r>
+              <a:rPr lang="en-US" dirty="0" err="1"/>
+              <a:t>sử</a:t>
+            </a:r>
+            <a:r>
+              <a:rPr lang="en-US" dirty="0"/>
+              <a:t> </a:t>
+            </a:r>
+            <a:r>
+              <a:rPr lang="en-US" dirty="0" err="1"/>
+              <a:t>dụng</a:t>
+            </a:r>
+            <a:endParaRPr lang="en-US" dirty="0"/>
           </a:p>
         </p:txBody>
       </p:sp>
       <p:sp>
         <p:nvSpPr>
-          <p:cNvPr id="3" name="Subtitle 2">
+          <p:cNvPr id="4" name="Content Placeholder 3">
             <a:extLst>
               <a:ext uri="{FF2B5EF4-FFF2-40B4-BE49-F238E27FC236}">
-                <a16:creationId xmlns:a16="http://schemas.microsoft.com/office/drawing/2014/main" id="{D1AB227C-F72B-0A3A-1BA0-B974084F3559}"/>
+                <a16:creationId xmlns:a16="http://schemas.microsoft.com/office/drawing/2014/main" id="{25FBB687-8C87-47BD-8FD2-167D33F42CC0}"/>
               </a:ext>
             </a:extLst>
           </p:cNvPr>
@@ -40028,7 +40187,7 @@
             <a:spLocks noGrp="1"/>
           </p:cNvSpPr>
           <p:nvPr>
-            <p:ph type="subTitle" idx="1"/>
+            <p:ph idx="1"/>
           </p:nvPr>
         </p:nvSpPr>
         <p:spPr/>
@@ -40036,39 +40195,333 @@
           <a:bodyPr/>
           <a:lstStyle/>
           <a:p>
-            <a:endParaRPr lang="en-US"/>
+            <a:r>
+              <a:rPr lang="en-US" dirty="0" err="1"/>
+              <a:t>Hàm</a:t>
+            </a:r>
+            <a:r>
+              <a:rPr lang="en-US" dirty="0"/>
+              <a:t> </a:t>
+            </a:r>
+            <a:r>
+              <a:rPr lang="en-US" dirty="0" err="1"/>
+              <a:t>mất</a:t>
+            </a:r>
+            <a:r>
+              <a:rPr lang="en-US" dirty="0"/>
+              <a:t> </a:t>
+            </a:r>
+            <a:r>
+              <a:rPr lang="en-US" dirty="0" err="1"/>
+              <a:t>mát</a:t>
+            </a:r>
+            <a:r>
+              <a:rPr lang="en-US" dirty="0"/>
+              <a:t>: log loss</a:t>
+            </a:r>
           </a:p>
-        </p:txBody>
-      </p:sp>
-      <p:sp>
-        <p:nvSpPr>
-          <p:cNvPr id="4" name="Text Placeholder 3">
-            <a:extLst>
-              <a:ext uri="{FF2B5EF4-FFF2-40B4-BE49-F238E27FC236}">
-                <a16:creationId xmlns:a16="http://schemas.microsoft.com/office/drawing/2014/main" id="{22A2249C-51C8-C10F-ACF3-9A8B868F97F6}"/>
-              </a:ext>
-            </a:extLst>
-          </p:cNvPr>
-          <p:cNvSpPr>
-            <a:spLocks noGrp="1"/>
-          </p:cNvSpPr>
-          <p:nvPr>
-            <p:ph type="body" sz="quarter" idx="12"/>
-          </p:nvPr>
-        </p:nvSpPr>
-        <p:spPr/>
-        <p:txBody>
-          <a:bodyPr/>
-          <a:lstStyle/>
           <a:p>
-            <a:endParaRPr lang="en-US"/>
+            <a:r>
+              <a:rPr lang="en-US" dirty="0"/>
+              <a:t>GNN: </a:t>
+            </a:r>
+            <a:r>
+              <a:rPr lang="en-US" dirty="0" err="1"/>
+              <a:t>GraphSAGE</a:t>
+            </a:r>
+            <a:endParaRPr lang="en-US" dirty="0"/>
+          </a:p>
+          <a:p>
+            <a:r>
+              <a:rPr lang="en-US" dirty="0" err="1"/>
+              <a:t>Tham</a:t>
+            </a:r>
+            <a:r>
+              <a:rPr lang="en-US" dirty="0"/>
+              <a:t> </a:t>
+            </a:r>
+            <a:r>
+              <a:rPr lang="en-US" dirty="0" err="1"/>
+              <a:t>số</a:t>
+            </a:r>
+            <a:r>
+              <a:rPr lang="en-US" dirty="0"/>
+              <a:t> </a:t>
+            </a:r>
+            <a:r>
+              <a:rPr lang="en-US" dirty="0" err="1"/>
+              <a:t>chuẩn</a:t>
+            </a:r>
+            <a:r>
+              <a:rPr lang="en-US" dirty="0"/>
+              <a:t> </a:t>
+            </a:r>
+            <a:r>
+              <a:rPr lang="en-US" dirty="0" err="1"/>
+              <a:t>hóa</a:t>
+            </a:r>
+            <a:r>
+              <a:rPr lang="en-US" dirty="0"/>
+              <a:t> </a:t>
+            </a:r>
+            <a:r>
+              <a:rPr lang="en-US" dirty="0" err="1"/>
+              <a:t>mô</a:t>
+            </a:r>
+            <a:r>
+              <a:rPr lang="en-US" dirty="0"/>
+              <a:t> </a:t>
+            </a:r>
+            <a:r>
+              <a:rPr lang="en-US" dirty="0" err="1"/>
+              <a:t>hình</a:t>
+            </a:r>
+            <a:r>
+              <a:rPr lang="en-US" dirty="0"/>
+              <a:t> </a:t>
+            </a:r>
+            <a:r>
+              <a:rPr lang="en-US" dirty="0" err="1"/>
+              <a:t>phân</a:t>
+            </a:r>
+            <a:r>
+              <a:rPr lang="en-US" dirty="0"/>
+              <a:t> </a:t>
+            </a:r>
+            <a:r>
+              <a:rPr lang="en-US" dirty="0" err="1"/>
+              <a:t>loại</a:t>
+            </a:r>
+            <a:r>
+              <a:rPr lang="en-US" dirty="0"/>
+              <a:t>: log1p</a:t>
+            </a:r>
+          </a:p>
+          <a:p>
+            <a:r>
+              <a:rPr lang="en-US" dirty="0" err="1"/>
+              <a:t>Phương</a:t>
+            </a:r>
+            <a:r>
+              <a:rPr lang="en-US" dirty="0"/>
+              <a:t> </a:t>
+            </a:r>
+            <a:r>
+              <a:rPr lang="en-US" dirty="0" err="1"/>
+              <a:t>pháp</a:t>
+            </a:r>
+            <a:r>
+              <a:rPr lang="en-US" dirty="0"/>
+              <a:t> </a:t>
+            </a:r>
+            <a:r>
+              <a:rPr lang="en-US" dirty="0" err="1"/>
+              <a:t>huấn</a:t>
+            </a:r>
+            <a:r>
+              <a:rPr lang="en-US" dirty="0"/>
+              <a:t> </a:t>
+            </a:r>
+            <a:r>
+              <a:rPr lang="en-US" dirty="0" err="1"/>
+              <a:t>luyện</a:t>
+            </a:r>
+            <a:r>
+              <a:rPr lang="en-US" dirty="0"/>
+              <a:t> GNN: </a:t>
+            </a:r>
+            <a:r>
+              <a:rPr lang="en-US" dirty="0" err="1"/>
+              <a:t>giám</a:t>
+            </a:r>
+            <a:r>
+              <a:rPr lang="en-US" dirty="0"/>
+              <a:t> </a:t>
+            </a:r>
+            <a:r>
+              <a:rPr lang="en-US" dirty="0" err="1"/>
+              <a:t>sát</a:t>
+            </a:r>
+            <a:endParaRPr lang="en-US" dirty="0"/>
+          </a:p>
+          <a:p>
+            <a:r>
+              <a:rPr lang="en-US" dirty="0" err="1"/>
+              <a:t>Phương</a:t>
+            </a:r>
+            <a:r>
+              <a:rPr lang="en-US" dirty="0"/>
+              <a:t> </a:t>
+            </a:r>
+            <a:r>
+              <a:rPr lang="en-US" dirty="0" err="1"/>
+              <a:t>pháp</a:t>
+            </a:r>
+            <a:r>
+              <a:rPr lang="en-US" dirty="0"/>
+              <a:t> </a:t>
+            </a:r>
+            <a:r>
+              <a:rPr lang="en-US" dirty="0" err="1"/>
+              <a:t>huấn</a:t>
+            </a:r>
+            <a:r>
+              <a:rPr lang="en-US" dirty="0"/>
+              <a:t> </a:t>
+            </a:r>
+            <a:r>
+              <a:rPr lang="en-US" dirty="0" err="1"/>
+              <a:t>luyện</a:t>
+            </a:r>
+            <a:r>
+              <a:rPr lang="en-US" dirty="0"/>
+              <a:t> </a:t>
+            </a:r>
+            <a:r>
+              <a:rPr lang="en-US" dirty="0" err="1"/>
+              <a:t>mô</a:t>
+            </a:r>
+            <a:r>
+              <a:rPr lang="en-US" dirty="0"/>
+              <a:t> </a:t>
+            </a:r>
+            <a:r>
+              <a:rPr lang="en-US" dirty="0" err="1"/>
+              <a:t>hình</a:t>
+            </a:r>
+            <a:r>
+              <a:rPr lang="en-US" dirty="0"/>
+              <a:t> </a:t>
+            </a:r>
+            <a:r>
+              <a:rPr lang="en-US" dirty="0" err="1"/>
+              <a:t>lai</a:t>
+            </a:r>
+            <a:r>
+              <a:rPr lang="en-US" dirty="0"/>
+              <a:t>: </a:t>
+            </a:r>
+            <a:r>
+              <a:rPr lang="en-US" dirty="0" err="1"/>
+              <a:t>tự</a:t>
+            </a:r>
+            <a:r>
+              <a:rPr lang="en-US" dirty="0"/>
+              <a:t> </a:t>
+            </a:r>
+            <a:r>
+              <a:rPr lang="en-US" dirty="0" err="1"/>
+              <a:t>giám</a:t>
+            </a:r>
+            <a:r>
+              <a:rPr lang="en-US" dirty="0"/>
+              <a:t> </a:t>
+            </a:r>
+            <a:r>
+              <a:rPr lang="en-US" dirty="0" err="1"/>
+              <a:t>sát</a:t>
+            </a:r>
+            <a:endParaRPr lang="en-US" dirty="0"/>
+          </a:p>
+          <a:p>
+            <a:r>
+              <a:rPr lang="en-US" dirty="0" err="1"/>
+              <a:t>Phương</a:t>
+            </a:r>
+            <a:r>
+              <a:rPr lang="en-US" dirty="0"/>
+              <a:t> </a:t>
+            </a:r>
+            <a:r>
+              <a:rPr lang="en-US" dirty="0" err="1"/>
+              <a:t>pháp</a:t>
+            </a:r>
+            <a:r>
+              <a:rPr lang="en-US" dirty="0"/>
+              <a:t> </a:t>
+            </a:r>
+            <a:r>
+              <a:rPr lang="en-US" dirty="0" err="1"/>
+              <a:t>tinh</a:t>
+            </a:r>
+            <a:r>
+              <a:rPr lang="en-US" dirty="0"/>
+              <a:t> </a:t>
+            </a:r>
+            <a:r>
+              <a:rPr lang="en-US" dirty="0" err="1"/>
+              <a:t>chỉnh</a:t>
+            </a:r>
+            <a:r>
+              <a:rPr lang="en-US" dirty="0"/>
+              <a:t> </a:t>
+            </a:r>
+            <a:r>
+              <a:rPr lang="en-US" dirty="0" err="1"/>
+              <a:t>tham</a:t>
+            </a:r>
+            <a:r>
+              <a:rPr lang="en-US" dirty="0"/>
+              <a:t> </a:t>
+            </a:r>
+            <a:r>
+              <a:rPr lang="en-US" dirty="0" err="1"/>
+              <a:t>số</a:t>
+            </a:r>
+            <a:r>
+              <a:rPr lang="en-US" dirty="0"/>
+              <a:t>: successive halving</a:t>
+            </a:r>
+          </a:p>
+          <a:p>
+            <a:r>
+              <a:rPr lang="en-US" dirty="0"/>
+              <a:t>Web: </a:t>
+            </a:r>
+            <a:r>
+              <a:rPr lang="en-US" dirty="0" err="1"/>
+              <a:t>streamlit</a:t>
+            </a:r>
+            <a:endParaRPr lang="en-US" dirty="0"/>
+          </a:p>
+          <a:p>
+            <a:r>
+              <a:rPr lang="en-US" dirty="0" err="1"/>
+              <a:t>Độ</a:t>
+            </a:r>
+            <a:r>
+              <a:rPr lang="en-US" dirty="0"/>
+              <a:t> </a:t>
+            </a:r>
+            <a:r>
+              <a:rPr lang="en-US" dirty="0" err="1"/>
+              <a:t>đo</a:t>
+            </a:r>
+            <a:r>
+              <a:rPr lang="en-US" dirty="0"/>
+              <a:t>: f1-minority, pr-</a:t>
+            </a:r>
+            <a:r>
+              <a:rPr lang="en-US" dirty="0" err="1"/>
+              <a:t>auc</a:t>
+            </a:r>
+            <a:r>
+              <a:rPr lang="en-US" dirty="0"/>
+              <a:t>, f1@0.5</a:t>
+            </a:r>
+          </a:p>
+          <a:p>
+            <a:endParaRPr lang="en-US" dirty="0"/>
+          </a:p>
+          <a:p>
+            <a:endParaRPr lang="en-US" dirty="0"/>
           </a:p>
         </p:txBody>
       </p:sp>
     </p:spTree>
     <p:extLst>
       <p:ext uri="{BB962C8B-B14F-4D97-AF65-F5344CB8AC3E}">
-        <p14:creationId xmlns:p14="http://schemas.microsoft.com/office/powerpoint/2010/main" val="731403071"/>
+        <p14:creationId xmlns:p14="http://schemas.microsoft.com/office/powerpoint/2010/main" val="2471689320"/>
       </p:ext>
     </p:extLst>
   </p:cSld>
@@ -40100,7 +40553,7 @@
           <p:cNvPr id="2" name="Title 1">
             <a:extLst>
               <a:ext uri="{FF2B5EF4-FFF2-40B4-BE49-F238E27FC236}">
-                <a16:creationId xmlns:a16="http://schemas.microsoft.com/office/drawing/2014/main" id="{192D5534-7827-4BC2-AA37-164B475ACC16}"/>
+                <a16:creationId xmlns:a16="http://schemas.microsoft.com/office/drawing/2014/main" id="{14E1C98C-59A6-490B-83BD-EE1E10A5BA9A}"/>
               </a:ext>
             </a:extLst>
           </p:cNvPr>
@@ -40108,57 +40561,68 @@
             <a:spLocks noGrp="1"/>
           </p:cNvSpPr>
           <p:nvPr>
-            <p:ph type="ctrTitle"/>
+            <p:ph type="title"/>
           </p:nvPr>
         </p:nvSpPr>
-        <p:spPr>
-          <a:xfrm>
-            <a:off x="1443567" y="1773238"/>
-            <a:ext cx="10029565" cy="1655762"/>
-          </a:xfrm>
-        </p:spPr>
+        <p:spPr/>
         <p:txBody>
           <a:bodyPr/>
           <a:lstStyle/>
           <a:p>
-            <a:endParaRPr lang="en-US"/>
+            <a:r>
+              <a:rPr lang="en-US" dirty="0"/>
+              <a:t>Pipeline </a:t>
+            </a:r>
+            <a:r>
+              <a:rPr lang="en-US" dirty="0" err="1"/>
+              <a:t>nhóm</a:t>
+            </a:r>
+            <a:r>
+              <a:rPr lang="en-US" dirty="0"/>
+              <a:t> 1</a:t>
+            </a:r>
           </a:p>
         </p:txBody>
       </p:sp>
-      <p:sp>
-        <p:nvSpPr>
-          <p:cNvPr id="3" name="Subtitle 2">
+      <p:pic>
+        <p:nvPicPr>
+          <p:cNvPr id="5" name="Content Placeholder 4">
             <a:extLst>
               <a:ext uri="{FF2B5EF4-FFF2-40B4-BE49-F238E27FC236}">
-                <a16:creationId xmlns:a16="http://schemas.microsoft.com/office/drawing/2014/main" id="{DDACE8DF-BE37-4B49-9A1D-4D0FC8ACB34A}"/>
+                <a16:creationId xmlns:a16="http://schemas.microsoft.com/office/drawing/2014/main" id="{F3F8CFCE-7A77-4115-A12D-4F2A1F5724D6}"/>
               </a:ext>
             </a:extLst>
           </p:cNvPr>
-          <p:cNvSpPr>
-            <a:spLocks noGrp="1"/>
-          </p:cNvSpPr>
+          <p:cNvPicPr>
+            <a:picLocks noGrp="1" noChangeAspect="1"/>
+          </p:cNvPicPr>
           <p:nvPr>
-            <p:ph type="subTitle" idx="1"/>
+            <p:ph idx="1"/>
           </p:nvPr>
-        </p:nvSpPr>
+        </p:nvPicPr>
+        <p:blipFill>
+          <a:blip r:embed="rId2">
+            <a:extLst>
+              <a:ext uri="{28A0092B-C50C-407E-A947-70E740481C1C}">
+                <a14:useLocalDpi xmlns:a14="http://schemas.microsoft.com/office/drawing/2010/main" val="0"/>
+              </a:ext>
+            </a:extLst>
+          </a:blip>
+          <a:stretch>
+            <a:fillRect/>
+          </a:stretch>
+        </p:blipFill>
         <p:spPr>
           <a:xfrm>
-            <a:off x="1443566" y="3428999"/>
-            <a:ext cx="10029565" cy="796491"/>
+            <a:off x="1445019" y="1825625"/>
+            <a:ext cx="9301962" cy="4351338"/>
           </a:xfrm>
         </p:spPr>
-        <p:txBody>
-          <a:bodyPr/>
-          <a:lstStyle/>
-          <a:p>
-            <a:endParaRPr lang="en-US"/>
-          </a:p>
-        </p:txBody>
-      </p:sp>
+      </p:pic>
     </p:spTree>
     <p:extLst>
       <p:ext uri="{BB962C8B-B14F-4D97-AF65-F5344CB8AC3E}">
-        <p14:creationId xmlns:p14="http://schemas.microsoft.com/office/powerpoint/2010/main" val="2203357190"/>
+        <p14:creationId xmlns:p14="http://schemas.microsoft.com/office/powerpoint/2010/main" val="2706205863"/>
       </p:ext>
     </p:extLst>
   </p:cSld>
@@ -40206,41 +40670,54 @@
           <a:bodyPr/>
           <a:lstStyle/>
           <a:p>
-            <a:endParaRPr lang="en-US"/>
+            <a:r>
+              <a:rPr lang="en-US" dirty="0"/>
+              <a:t>Pipeline </a:t>
+            </a:r>
+            <a:r>
+              <a:rPr lang="en-US" dirty="0" err="1"/>
+              <a:t>nhóm</a:t>
+            </a:r>
+            <a:r>
+              <a:rPr lang="en-US" dirty="0"/>
+              <a:t> 2</a:t>
+            </a:r>
           </a:p>
         </p:txBody>
       </p:sp>
-      <p:sp>
-        <p:nvSpPr>
-          <p:cNvPr id="3" name="Content Placeholder 2">
+      <p:pic>
+        <p:nvPicPr>
+          <p:cNvPr id="5" name="Content Placeholder 4">
             <a:extLst>
               <a:ext uri="{FF2B5EF4-FFF2-40B4-BE49-F238E27FC236}">
-                <a16:creationId xmlns:a16="http://schemas.microsoft.com/office/drawing/2014/main" id="{E48B3A4D-EB59-4245-BACF-15AE3A78BA4E}"/>
+                <a16:creationId xmlns:a16="http://schemas.microsoft.com/office/drawing/2014/main" id="{2CCD72FE-1AAD-4A6A-825D-3A47DBC88A7A}"/>
               </a:ext>
             </a:extLst>
           </p:cNvPr>
-          <p:cNvSpPr>
-            <a:spLocks noGrp="1"/>
-          </p:cNvSpPr>
+          <p:cNvPicPr>
+            <a:picLocks noGrp="1" noChangeAspect="1"/>
+          </p:cNvPicPr>
           <p:nvPr>
             <p:ph idx="1"/>
           </p:nvPr>
-        </p:nvSpPr>
-        <p:spPr/>
-        <p:txBody>
-          <a:bodyPr>
-            <a:normAutofit/>
-          </a:bodyPr>
-          <a:lstStyle/>
-          <a:p>
-            <a:endParaRPr lang="en-US"/>
-          </a:p>
-        </p:txBody>
-      </p:sp>
+        </p:nvPicPr>
+        <p:blipFill>
+          <a:blip r:embed="rId2"/>
+          <a:stretch>
+            <a:fillRect/>
+          </a:stretch>
+        </p:blipFill>
+        <p:spPr>
+          <a:xfrm>
+            <a:off x="838200" y="1966435"/>
+            <a:ext cx="10515600" cy="4069718"/>
+          </a:xfrm>
+        </p:spPr>
+      </p:pic>
     </p:spTree>
     <p:extLst>
       <p:ext uri="{BB962C8B-B14F-4D97-AF65-F5344CB8AC3E}">
-        <p14:creationId xmlns:p14="http://schemas.microsoft.com/office/powerpoint/2010/main" val="2706205863"/>
+        <p14:creationId xmlns:p14="http://schemas.microsoft.com/office/powerpoint/2010/main" val="2704599924"/>
       </p:ext>
     </p:extLst>
   </p:cSld>
@@ -40269,10 +40746,10 @@
       </p:grpSpPr>
       <p:sp>
         <p:nvSpPr>
-          <p:cNvPr id="4" name="Title 3">
+          <p:cNvPr id="2" name="Title 1">
             <a:extLst>
               <a:ext uri="{FF2B5EF4-FFF2-40B4-BE49-F238E27FC236}">
-                <a16:creationId xmlns:a16="http://schemas.microsoft.com/office/drawing/2014/main" id="{1D8EBF9F-2BAC-9E30-FDF7-F09547A89C3A}"/>
+                <a16:creationId xmlns:a16="http://schemas.microsoft.com/office/drawing/2014/main" id="{14E1C98C-59A6-490B-83BD-EE1E10A5BA9A}"/>
               </a:ext>
             </a:extLst>
           </p:cNvPr>
@@ -40280,7 +40757,7 @@
             <a:spLocks noGrp="1"/>
           </p:cNvSpPr>
           <p:nvPr>
-            <p:ph type="ctrTitle"/>
+            <p:ph type="title"/>
           </p:nvPr>
         </p:nvSpPr>
         <p:spPr/>
@@ -40288,64 +40765,84 @@
           <a:bodyPr/>
           <a:lstStyle/>
           <a:p>
-            <a:endParaRPr lang="en-US"/>
+            <a:r>
+              <a:rPr lang="en-US" dirty="0"/>
+              <a:t>Pipeline </a:t>
+            </a:r>
+            <a:r>
+              <a:rPr lang="en-US" dirty="0" err="1"/>
+              <a:t>nhóm</a:t>
+            </a:r>
+            <a:r>
+              <a:rPr lang="en-US" dirty="0"/>
+              <a:t> 3</a:t>
+            </a:r>
           </a:p>
         </p:txBody>
       </p:sp>
-      <p:sp>
-        <p:nvSpPr>
-          <p:cNvPr id="5" name="Subtitle 4">
+      <p:pic>
+        <p:nvPicPr>
+          <p:cNvPr id="5" name="Content Placeholder 4">
             <a:extLst>
               <a:ext uri="{FF2B5EF4-FFF2-40B4-BE49-F238E27FC236}">
-                <a16:creationId xmlns:a16="http://schemas.microsoft.com/office/drawing/2014/main" id="{3C4A362E-937E-69DB-344A-0ABB82ECFE06}"/>
+                <a16:creationId xmlns:a16="http://schemas.microsoft.com/office/drawing/2014/main" id="{9B7D2C06-8D1B-423A-A6D3-8185C16B0F5A}"/>
               </a:ext>
             </a:extLst>
           </p:cNvPr>
-          <p:cNvSpPr>
-            <a:spLocks noGrp="1"/>
-          </p:cNvSpPr>
+          <p:cNvPicPr>
+            <a:picLocks noGrp="1" noChangeAspect="1"/>
+          </p:cNvPicPr>
           <p:nvPr>
-            <p:ph type="subTitle" idx="1"/>
+            <p:ph idx="1"/>
           </p:nvPr>
-        </p:nvSpPr>
-        <p:spPr/>
-        <p:txBody>
-          <a:bodyPr/>
-          <a:lstStyle/>
-          <a:p>
-            <a:endParaRPr lang="en-US"/>
-          </a:p>
-        </p:txBody>
-      </p:sp>
-      <p:sp>
-        <p:nvSpPr>
-          <p:cNvPr id="6" name="Content Placeholder 5">
+        </p:nvPicPr>
+        <p:blipFill>
+          <a:blip r:embed="rId2"/>
+          <a:stretch>
+            <a:fillRect/>
+          </a:stretch>
+        </p:blipFill>
+        <p:spPr>
+          <a:xfrm>
+            <a:off x="838200" y="1966435"/>
+            <a:ext cx="10515600" cy="4069718"/>
+          </a:xfrm>
+        </p:spPr>
+      </p:pic>
+      <p:pic>
+        <p:nvPicPr>
+          <p:cNvPr id="6" name="Content Placeholder 4">
             <a:extLst>
               <a:ext uri="{FF2B5EF4-FFF2-40B4-BE49-F238E27FC236}">
-                <a16:creationId xmlns:a16="http://schemas.microsoft.com/office/drawing/2014/main" id="{DC4D183A-9405-1B18-BAE7-D23D6EF86888}"/>
+                <a16:creationId xmlns:a16="http://schemas.microsoft.com/office/drawing/2014/main" id="{2925E3DB-CA99-47BB-8D6B-FDC97A9B0911}"/>
               </a:ext>
             </a:extLst>
           </p:cNvPr>
-          <p:cNvSpPr>
-            <a:spLocks noGrp="1"/>
-          </p:cNvSpPr>
-          <p:nvPr>
-            <p:ph sz="quarter" idx="12"/>
-          </p:nvPr>
-        </p:nvSpPr>
-        <p:spPr/>
-        <p:txBody>
-          <a:bodyPr/>
-          <a:lstStyle/>
-          <a:p>
-            <a:endParaRPr lang="en-US"/>
-          </a:p>
-        </p:txBody>
-      </p:sp>
+          <p:cNvPicPr>
+            <a:picLocks noChangeAspect="1"/>
+          </p:cNvPicPr>
+          <p:nvPr/>
+        </p:nvPicPr>
+        <p:blipFill>
+          <a:blip r:embed="rId2"/>
+          <a:stretch>
+            <a:fillRect/>
+          </a:stretch>
+        </p:blipFill>
+        <p:spPr>
+          <a:xfrm>
+            <a:off x="838200" y="1993329"/>
+            <a:ext cx="10515600" cy="4069718"/>
+          </a:xfrm>
+          <a:prstGeom prst="rect">
+            <a:avLst/>
+          </a:prstGeom>
+        </p:spPr>
+      </p:pic>
     </p:spTree>
     <p:extLst>
       <p:ext uri="{BB962C8B-B14F-4D97-AF65-F5344CB8AC3E}">
-        <p14:creationId xmlns:p14="http://schemas.microsoft.com/office/powerpoint/2010/main" val="293118606"/>
+        <p14:creationId xmlns:p14="http://schemas.microsoft.com/office/powerpoint/2010/main" val="235833177"/>
       </p:ext>
     </p:extLst>
   </p:cSld>
@@ -40356,161 +40853,6 @@
 </file>
 
 <file path=ppt/slides/slide6.xml><?xml version="1.0" encoding="utf-8"?>
-<p:sld xmlns:a="http://schemas.openxmlformats.org/drawingml/2006/main" xmlns:r="http://schemas.openxmlformats.org/officeDocument/2006/relationships" xmlns:p="http://schemas.openxmlformats.org/presentationml/2006/main">
-  <p:cSld>
-    <p:spTree>
-      <p:nvGrpSpPr>
-        <p:cNvPr id="1" name=""/>
-        <p:cNvGrpSpPr/>
-        <p:nvPr/>
-      </p:nvGrpSpPr>
-      <p:grpSpPr>
-        <a:xfrm>
-          <a:off x="0" y="0"/>
-          <a:ext cx="0" cy="0"/>
-          <a:chOff x="0" y="0"/>
-          <a:chExt cx="0" cy="0"/>
-        </a:xfrm>
-      </p:grpSpPr>
-      <p:sp>
-        <p:nvSpPr>
-          <p:cNvPr id="2" name="Title 1">
-            <a:extLst>
-              <a:ext uri="{FF2B5EF4-FFF2-40B4-BE49-F238E27FC236}">
-                <a16:creationId xmlns:a16="http://schemas.microsoft.com/office/drawing/2014/main" id="{F13F27A9-2D24-7DD4-711A-8CB14A03C54A}"/>
-              </a:ext>
-            </a:extLst>
-          </p:cNvPr>
-          <p:cNvSpPr>
-            <a:spLocks noGrp="1"/>
-          </p:cNvSpPr>
-          <p:nvPr>
-            <p:ph type="ctrTitle"/>
-          </p:nvPr>
-        </p:nvSpPr>
-        <p:spPr/>
-        <p:txBody>
-          <a:bodyPr/>
-          <a:lstStyle/>
-          <a:p>
-            <a:endParaRPr lang="en-US"/>
-          </a:p>
-        </p:txBody>
-      </p:sp>
-      <p:sp>
-        <p:nvSpPr>
-          <p:cNvPr id="3" name="Subtitle 2">
-            <a:extLst>
-              <a:ext uri="{FF2B5EF4-FFF2-40B4-BE49-F238E27FC236}">
-                <a16:creationId xmlns:a16="http://schemas.microsoft.com/office/drawing/2014/main" id="{37C92DC9-95C6-3F7E-358C-74EA3AFBDE35}"/>
-              </a:ext>
-            </a:extLst>
-          </p:cNvPr>
-          <p:cNvSpPr>
-            <a:spLocks noGrp="1"/>
-          </p:cNvSpPr>
-          <p:nvPr>
-            <p:ph type="subTitle" idx="1"/>
-          </p:nvPr>
-        </p:nvSpPr>
-        <p:spPr/>
-        <p:txBody>
-          <a:bodyPr/>
-          <a:lstStyle/>
-          <a:p>
-            <a:endParaRPr lang="en-US"/>
-          </a:p>
-        </p:txBody>
-      </p:sp>
-      <p:sp>
-        <p:nvSpPr>
-          <p:cNvPr id="4" name="Picture Placeholder 3">
-            <a:extLst>
-              <a:ext uri="{FF2B5EF4-FFF2-40B4-BE49-F238E27FC236}">
-                <a16:creationId xmlns:a16="http://schemas.microsoft.com/office/drawing/2014/main" id="{6F88E9EB-6098-7FA2-3FE3-73843C616046}"/>
-              </a:ext>
-            </a:extLst>
-          </p:cNvPr>
-          <p:cNvSpPr>
-            <a:spLocks noGrp="1"/>
-          </p:cNvSpPr>
-          <p:nvPr>
-            <p:ph type="pic" sz="quarter" idx="12"/>
-          </p:nvPr>
-        </p:nvSpPr>
-        <p:spPr/>
-        <p:txBody>
-          <a:bodyPr/>
-          <a:lstStyle/>
-          <a:p>
-            <a:endParaRPr lang="en-US"/>
-          </a:p>
-        </p:txBody>
-      </p:sp>
-      <p:sp>
-        <p:nvSpPr>
-          <p:cNvPr id="5" name="Picture Placeholder 4">
-            <a:extLst>
-              <a:ext uri="{FF2B5EF4-FFF2-40B4-BE49-F238E27FC236}">
-                <a16:creationId xmlns:a16="http://schemas.microsoft.com/office/drawing/2014/main" id="{07D34A94-EE84-38E4-F7AF-2FE7FC5F9506}"/>
-              </a:ext>
-            </a:extLst>
-          </p:cNvPr>
-          <p:cNvSpPr>
-            <a:spLocks noGrp="1"/>
-          </p:cNvSpPr>
-          <p:nvPr>
-            <p:ph type="pic" sz="quarter" idx="13"/>
-          </p:nvPr>
-        </p:nvSpPr>
-        <p:spPr/>
-        <p:txBody>
-          <a:bodyPr/>
-          <a:lstStyle/>
-          <a:p>
-            <a:endParaRPr lang="en-US"/>
-          </a:p>
-        </p:txBody>
-      </p:sp>
-      <p:sp>
-        <p:nvSpPr>
-          <p:cNvPr id="6" name="Picture Placeholder 5">
-            <a:extLst>
-              <a:ext uri="{FF2B5EF4-FFF2-40B4-BE49-F238E27FC236}">
-                <a16:creationId xmlns:a16="http://schemas.microsoft.com/office/drawing/2014/main" id="{71C5B678-ACF6-FE90-8CFB-3B621A94E63F}"/>
-              </a:ext>
-            </a:extLst>
-          </p:cNvPr>
-          <p:cNvSpPr>
-            <a:spLocks noGrp="1"/>
-          </p:cNvSpPr>
-          <p:nvPr>
-            <p:ph type="pic" sz="quarter" idx="14"/>
-          </p:nvPr>
-        </p:nvSpPr>
-        <p:spPr/>
-        <p:txBody>
-          <a:bodyPr/>
-          <a:lstStyle/>
-          <a:p>
-            <a:endParaRPr lang="en-US"/>
-          </a:p>
-        </p:txBody>
-      </p:sp>
-    </p:spTree>
-    <p:extLst>
-      <p:ext uri="{BB962C8B-B14F-4D97-AF65-F5344CB8AC3E}">
-        <p14:creationId xmlns:p14="http://schemas.microsoft.com/office/powerpoint/2010/main" val="902549347"/>
-      </p:ext>
-    </p:extLst>
-  </p:cSld>
-  <p:clrMapOvr>
-    <a:masterClrMapping/>
-  </p:clrMapOvr>
-</p:sld>
-</file>
-
-<file path=ppt/slides/slide7.xml><?xml version="1.0" encoding="utf-8"?>
 <p:sld xmlns:a="http://schemas.openxmlformats.org/drawingml/2006/main" xmlns:r="http://schemas.openxmlformats.org/officeDocument/2006/relationships" xmlns:p="http://schemas.openxmlformats.org/presentationml/2006/main">
   <p:cSld>
     <p:spTree>
@@ -40667,6 +41009,92 @@
 </p:sld>
 </file>
 
+<file path=ppt/slides/slide7.xml><?xml version="1.0" encoding="utf-8"?>
+<p:sld xmlns:a="http://schemas.openxmlformats.org/drawingml/2006/main" xmlns:r="http://schemas.openxmlformats.org/officeDocument/2006/relationships" xmlns:p="http://schemas.openxmlformats.org/presentationml/2006/main">
+  <p:cSld>
+    <p:spTree>
+      <p:nvGrpSpPr>
+        <p:cNvPr id="1" name=""/>
+        <p:cNvGrpSpPr/>
+        <p:nvPr/>
+      </p:nvGrpSpPr>
+      <p:grpSpPr>
+        <a:xfrm>
+          <a:off x="0" y="0"/>
+          <a:ext cx="0" cy="0"/>
+          <a:chOff x="0" y="0"/>
+          <a:chExt cx="0" cy="0"/>
+        </a:xfrm>
+      </p:grpSpPr>
+      <p:sp>
+        <p:nvSpPr>
+          <p:cNvPr id="2" name="Title 1">
+            <a:extLst>
+              <a:ext uri="{FF2B5EF4-FFF2-40B4-BE49-F238E27FC236}">
+                <a16:creationId xmlns:a16="http://schemas.microsoft.com/office/drawing/2014/main" id="{6727981F-8DDB-4942-9095-1A301A93096A}"/>
+              </a:ext>
+            </a:extLst>
+          </p:cNvPr>
+          <p:cNvSpPr>
+            <a:spLocks noGrp="1"/>
+          </p:cNvSpPr>
+          <p:nvPr>
+            <p:ph type="ctrTitle"/>
+          </p:nvPr>
+        </p:nvSpPr>
+        <p:spPr/>
+        <p:txBody>
+          <a:bodyPr/>
+          <a:lstStyle/>
+          <a:p>
+            <a:r>
+              <a:rPr lang="en-US"/>
+              <a:t>CÁM ƠN</a:t>
+            </a:r>
+          </a:p>
+        </p:txBody>
+      </p:sp>
+      <p:sp>
+        <p:nvSpPr>
+          <p:cNvPr id="3" name="Subtitle 2">
+            <a:extLst>
+              <a:ext uri="{FF2B5EF4-FFF2-40B4-BE49-F238E27FC236}">
+                <a16:creationId xmlns:a16="http://schemas.microsoft.com/office/drawing/2014/main" id="{E3DE8CBC-CC0F-41DD-9762-03FD26D3B012}"/>
+              </a:ext>
+            </a:extLst>
+          </p:cNvPr>
+          <p:cNvSpPr>
+            <a:spLocks noGrp="1"/>
+          </p:cNvSpPr>
+          <p:nvPr>
+            <p:ph type="subTitle" idx="1"/>
+          </p:nvPr>
+        </p:nvSpPr>
+        <p:spPr/>
+        <p:txBody>
+          <a:bodyPr/>
+          <a:lstStyle/>
+          <a:p>
+            <a:r>
+              <a:rPr lang="en-US"/>
+              <a:t>Thank you</a:t>
+            </a:r>
+          </a:p>
+        </p:txBody>
+      </p:sp>
+    </p:spTree>
+    <p:extLst>
+      <p:ext uri="{BB962C8B-B14F-4D97-AF65-F5344CB8AC3E}">
+        <p14:creationId xmlns:p14="http://schemas.microsoft.com/office/powerpoint/2010/main" val="131648227"/>
+      </p:ext>
+    </p:extLst>
+  </p:cSld>
+  <p:clrMapOvr>
+    <a:masterClrMapping/>
+  </p:clrMapOvr>
+</p:sld>
+</file>
+
 <file path=ppt/slides/slide8.xml><?xml version="1.0" encoding="utf-8"?>
 <p:sld xmlns:a="http://schemas.openxmlformats.org/drawingml/2006/main" xmlns:r="http://schemas.openxmlformats.org/officeDocument/2006/relationships" xmlns:p="http://schemas.openxmlformats.org/presentationml/2006/main">
   <p:cSld>
@@ -40686,35 +41114,10 @@
       </p:grpSpPr>
       <p:sp>
         <p:nvSpPr>
-          <p:cNvPr id="2" name="Picture Placeholder 1">
+          <p:cNvPr id="4" name="Title 3">
             <a:extLst>
               <a:ext uri="{FF2B5EF4-FFF2-40B4-BE49-F238E27FC236}">
-                <a16:creationId xmlns:a16="http://schemas.microsoft.com/office/drawing/2014/main" id="{B309368D-80CF-13C8-01DF-AC8188BD7C87}"/>
-              </a:ext>
-            </a:extLst>
-          </p:cNvPr>
-          <p:cNvSpPr>
-            <a:spLocks noGrp="1"/>
-          </p:cNvSpPr>
-          <p:nvPr>
-            <p:ph type="pic" sz="quarter" idx="12"/>
-          </p:nvPr>
-        </p:nvSpPr>
-        <p:spPr/>
-        <p:txBody>
-          <a:bodyPr/>
-          <a:lstStyle/>
-          <a:p>
-            <a:endParaRPr lang="en-US"/>
-          </a:p>
-        </p:txBody>
-      </p:sp>
-      <p:sp>
-        <p:nvSpPr>
-          <p:cNvPr id="3" name="Title 2">
-            <a:extLst>
-              <a:ext uri="{FF2B5EF4-FFF2-40B4-BE49-F238E27FC236}">
-                <a16:creationId xmlns:a16="http://schemas.microsoft.com/office/drawing/2014/main" id="{A904581F-8973-0C84-291E-542AFB439C4F}"/>
+                <a16:creationId xmlns:a16="http://schemas.microsoft.com/office/drawing/2014/main" id="{1D8EBF9F-2BAC-9E30-FDF7-F09547A89C3A}"/>
               </a:ext>
             </a:extLst>
           </p:cNvPr>
@@ -40736,10 +41139,10 @@
       </p:sp>
       <p:sp>
         <p:nvSpPr>
-          <p:cNvPr id="4" name="Subtitle 3">
+          <p:cNvPr id="5" name="Subtitle 4">
             <a:extLst>
               <a:ext uri="{FF2B5EF4-FFF2-40B4-BE49-F238E27FC236}">
-                <a16:creationId xmlns:a16="http://schemas.microsoft.com/office/drawing/2014/main" id="{064DBEAB-3C67-BC6D-B59C-AC9B97F5F3EF}"/>
+                <a16:creationId xmlns:a16="http://schemas.microsoft.com/office/drawing/2014/main" id="{3C4A362E-937E-69DB-344A-0ABB82ECFE06}"/>
               </a:ext>
             </a:extLst>
           </p:cNvPr>
@@ -40759,10 +41162,35 @@
           </a:p>
         </p:txBody>
       </p:sp>
+      <p:sp>
+        <p:nvSpPr>
+          <p:cNvPr id="6" name="Content Placeholder 5">
+            <a:extLst>
+              <a:ext uri="{FF2B5EF4-FFF2-40B4-BE49-F238E27FC236}">
+                <a16:creationId xmlns:a16="http://schemas.microsoft.com/office/drawing/2014/main" id="{DC4D183A-9405-1B18-BAE7-D23D6EF86888}"/>
+              </a:ext>
+            </a:extLst>
+          </p:cNvPr>
+          <p:cNvSpPr>
+            <a:spLocks noGrp="1"/>
+          </p:cNvSpPr>
+          <p:nvPr>
+            <p:ph sz="quarter" idx="12"/>
+          </p:nvPr>
+        </p:nvSpPr>
+        <p:spPr/>
+        <p:txBody>
+          <a:bodyPr/>
+          <a:lstStyle/>
+          <a:p>
+            <a:endParaRPr lang="en-US"/>
+          </a:p>
+        </p:txBody>
+      </p:sp>
     </p:spTree>
     <p:extLst>
       <p:ext uri="{BB962C8B-B14F-4D97-AF65-F5344CB8AC3E}">
-        <p14:creationId xmlns:p14="http://schemas.microsoft.com/office/powerpoint/2010/main" val="2903526848"/>
+        <p14:creationId xmlns:p14="http://schemas.microsoft.com/office/powerpoint/2010/main" val="293118606"/>
       </p:ext>
     </p:extLst>
   </p:cSld>
@@ -40794,7 +41222,7 @@
           <p:cNvPr id="2" name="Title 1">
             <a:extLst>
               <a:ext uri="{FF2B5EF4-FFF2-40B4-BE49-F238E27FC236}">
-                <a16:creationId xmlns:a16="http://schemas.microsoft.com/office/drawing/2014/main" id="{E47F9D08-0D5F-1827-1F0A-67420FD2E196}"/>
+                <a16:creationId xmlns:a16="http://schemas.microsoft.com/office/drawing/2014/main" id="{F13F27A9-2D24-7DD4-711A-8CB14A03C54A}"/>
               </a:ext>
             </a:extLst>
           </p:cNvPr>
@@ -40819,7 +41247,7 @@
           <p:cNvPr id="3" name="Subtitle 2">
             <a:extLst>
               <a:ext uri="{FF2B5EF4-FFF2-40B4-BE49-F238E27FC236}">
-                <a16:creationId xmlns:a16="http://schemas.microsoft.com/office/drawing/2014/main" id="{326F5F39-C814-49EB-D5B3-097B436AD3E7}"/>
+                <a16:creationId xmlns:a16="http://schemas.microsoft.com/office/drawing/2014/main" id="{37C92DC9-95C6-3F7E-358C-74EA3AFBDE35}"/>
               </a:ext>
             </a:extLst>
           </p:cNvPr>
@@ -40844,7 +41272,7 @@
           <p:cNvPr id="4" name="Picture Placeholder 3">
             <a:extLst>
               <a:ext uri="{FF2B5EF4-FFF2-40B4-BE49-F238E27FC236}">
-                <a16:creationId xmlns:a16="http://schemas.microsoft.com/office/drawing/2014/main" id="{06D78226-E86C-748B-C52C-76AC0CAE9D16}"/>
+                <a16:creationId xmlns:a16="http://schemas.microsoft.com/office/drawing/2014/main" id="{6F88E9EB-6098-7FA2-3FE3-73843C616046}"/>
               </a:ext>
             </a:extLst>
           </p:cNvPr>
@@ -40864,10 +41292,60 @@
           </a:p>
         </p:txBody>
       </p:sp>
+      <p:sp>
+        <p:nvSpPr>
+          <p:cNvPr id="5" name="Picture Placeholder 4">
+            <a:extLst>
+              <a:ext uri="{FF2B5EF4-FFF2-40B4-BE49-F238E27FC236}">
+                <a16:creationId xmlns:a16="http://schemas.microsoft.com/office/drawing/2014/main" id="{07D34A94-EE84-38E4-F7AF-2FE7FC5F9506}"/>
+              </a:ext>
+            </a:extLst>
+          </p:cNvPr>
+          <p:cNvSpPr>
+            <a:spLocks noGrp="1"/>
+          </p:cNvSpPr>
+          <p:nvPr>
+            <p:ph type="pic" sz="quarter" idx="13"/>
+          </p:nvPr>
+        </p:nvSpPr>
+        <p:spPr/>
+        <p:txBody>
+          <a:bodyPr/>
+          <a:lstStyle/>
+          <a:p>
+            <a:endParaRPr lang="en-US"/>
+          </a:p>
+        </p:txBody>
+      </p:sp>
+      <p:sp>
+        <p:nvSpPr>
+          <p:cNvPr id="6" name="Picture Placeholder 5">
+            <a:extLst>
+              <a:ext uri="{FF2B5EF4-FFF2-40B4-BE49-F238E27FC236}">
+                <a16:creationId xmlns:a16="http://schemas.microsoft.com/office/drawing/2014/main" id="{71C5B678-ACF6-FE90-8CFB-3B621A94E63F}"/>
+              </a:ext>
+            </a:extLst>
+          </p:cNvPr>
+          <p:cNvSpPr>
+            <a:spLocks noGrp="1"/>
+          </p:cNvSpPr>
+          <p:nvPr>
+            <p:ph type="pic" sz="quarter" idx="14"/>
+          </p:nvPr>
+        </p:nvSpPr>
+        <p:spPr/>
+        <p:txBody>
+          <a:bodyPr/>
+          <a:lstStyle/>
+          <a:p>
+            <a:endParaRPr lang="en-US"/>
+          </a:p>
+        </p:txBody>
+      </p:sp>
     </p:spTree>
     <p:extLst>
       <p:ext uri="{BB962C8B-B14F-4D97-AF65-F5344CB8AC3E}">
-        <p14:creationId xmlns:p14="http://schemas.microsoft.com/office/powerpoint/2010/main" val="3562301540"/>
+        <p14:creationId xmlns:p14="http://schemas.microsoft.com/office/powerpoint/2010/main" val="902549347"/>
       </p:ext>
     </p:extLst>
   </p:cSld>

--- a/thuyết trình.pptx
+++ b/thuyết trình.pptx
@@ -10,42 +10,49 @@
     <p:sldId id="259" r:id="rId4"/>
     <p:sldId id="270" r:id="rId5"/>
     <p:sldId id="271" r:id="rId6"/>
-    <p:sldId id="269" r:id="rId7"/>
-    <p:sldId id="261" r:id="rId8"/>
-    <p:sldId id="258" r:id="rId9"/>
-    <p:sldId id="263" r:id="rId10"/>
-    <p:sldId id="266" r:id="rId11"/>
-    <p:sldId id="267" r:id="rId12"/>
-    <p:sldId id="268" r:id="rId13"/>
+    <p:sldId id="273" r:id="rId7"/>
+    <p:sldId id="274" r:id="rId8"/>
+    <p:sldId id="261" r:id="rId9"/>
+    <p:sldId id="269" r:id="rId10"/>
+    <p:sldId id="258" r:id="rId11"/>
+    <p:sldId id="263" r:id="rId12"/>
+    <p:sldId id="266" r:id="rId13"/>
+    <p:sldId id="267" r:id="rId14"/>
+    <p:sldId id="268" r:id="rId15"/>
   </p:sldIdLst>
   <p:sldSz cx="12192000" cy="6858000"/>
   <p:notesSz cx="6858000" cy="9144000"/>
   <p:embeddedFontLst>
     <p:embeddedFont>
       <p:font typeface="Barlow" panose="00000500000000000000" pitchFamily="2" charset="0"/>
-      <p:regular r:id="rId14"/>
-      <p:bold r:id="rId15"/>
-      <p:italic r:id="rId16"/>
-      <p:boldItalic r:id="rId17"/>
+      <p:regular r:id="rId16"/>
+      <p:bold r:id="rId17"/>
+      <p:italic r:id="rId18"/>
+      <p:boldItalic r:id="rId19"/>
     </p:embeddedFont>
     <p:embeddedFont>
       <p:font typeface="Calibri" panose="020F0502020204030204" pitchFamily="34" charset="0"/>
-      <p:regular r:id="rId18"/>
-      <p:bold r:id="rId19"/>
-      <p:italic r:id="rId20"/>
-      <p:boldItalic r:id="rId21"/>
+      <p:regular r:id="rId20"/>
+      <p:bold r:id="rId21"/>
+      <p:italic r:id="rId22"/>
+      <p:boldItalic r:id="rId23"/>
     </p:embeddedFont>
     <p:embeddedFont>
       <p:font typeface="K2D" panose="020B0604020202020204" charset="-34"/>
-      <p:regular r:id="rId22"/>
-      <p:bold r:id="rId23"/>
-      <p:italic r:id="rId24"/>
-      <p:boldItalic r:id="rId25"/>
+      <p:regular r:id="rId24"/>
+      <p:bold r:id="rId25"/>
+      <p:italic r:id="rId26"/>
+      <p:boldItalic r:id="rId27"/>
     </p:embeddedFont>
     <p:embeddedFont>
       <p:font typeface="Readex Pro" panose="020B0604020202020204" charset="-78"/>
-      <p:regular r:id="rId26"/>
-      <p:bold r:id="rId27"/>
+      <p:regular r:id="rId28"/>
+      <p:bold r:id="rId29"/>
+    </p:embeddedFont>
+    <p:embeddedFont>
+      <p:font typeface="Tahoma" panose="020B0604030504040204" pitchFamily="34" charset="0"/>
+      <p:regular r:id="rId30"/>
+      <p:bold r:id="rId31"/>
     </p:embeddedFont>
   </p:embeddedFontLst>
   <p:defaultTextStyle>
@@ -1076,7 +1083,7 @@
             <a:fld id="{D86B3AB3-BDCC-41BF-8781-963E853753C3}" type="datetime1">
               <a:rPr lang="en-US" smtClean="0"/>
               <a:pPr/>
-              <a:t>8/19/2026</a:t>
+              <a:t>8/20/2026</a:t>
             </a:fld>
             <a:endParaRPr lang="en-US"/>
           </a:p>
@@ -2488,7 +2495,7 @@
             <a:fld id="{D86B3AB3-BDCC-41BF-8781-963E853753C3}" type="datetime1">
               <a:rPr lang="en-US" smtClean="0"/>
               <a:pPr/>
-              <a:t>8/19/2026</a:t>
+              <a:t>8/20/2026</a:t>
             </a:fld>
             <a:endParaRPr lang="en-US"/>
           </a:p>
@@ -3730,7 +3737,7 @@
             <a:fld id="{D86B3AB3-BDCC-41BF-8781-963E853753C3}" type="datetime1">
               <a:rPr lang="en-US" smtClean="0"/>
               <a:pPr/>
-              <a:t>8/19/2026</a:t>
+              <a:t>8/20/2026</a:t>
             </a:fld>
             <a:endParaRPr lang="en-US"/>
           </a:p>
@@ -4964,7 +4971,7 @@
             <a:fld id="{D86B3AB3-BDCC-41BF-8781-963E853753C3}" type="datetime1">
               <a:rPr lang="en-US" smtClean="0"/>
               <a:pPr/>
-              <a:t>8/19/2026</a:t>
+              <a:t>8/20/2026</a:t>
             </a:fld>
             <a:endParaRPr lang="en-US"/>
           </a:p>
@@ -6086,7 +6093,7 @@
             <a:fld id="{D86B3AB3-BDCC-41BF-8781-963E853753C3}" type="datetime1">
               <a:rPr lang="en-US" smtClean="0"/>
               <a:pPr/>
-              <a:t>8/19/2026</a:t>
+              <a:t>8/20/2026</a:t>
             </a:fld>
             <a:endParaRPr lang="en-US"/>
           </a:p>
@@ -7208,7 +7215,7 @@
             <a:fld id="{D86B3AB3-BDCC-41BF-8781-963E853753C3}" type="datetime1">
               <a:rPr lang="en-US" smtClean="0"/>
               <a:pPr/>
-              <a:t>8/19/2026</a:t>
+              <a:t>8/20/2026</a:t>
             </a:fld>
             <a:endParaRPr lang="en-US"/>
           </a:p>
@@ -8348,7 +8355,7 @@
             <a:fld id="{D86B3AB3-BDCC-41BF-8781-963E853753C3}" type="datetime1">
               <a:rPr lang="en-US" smtClean="0"/>
               <a:pPr/>
-              <a:t>8/19/2026</a:t>
+              <a:t>8/20/2026</a:t>
             </a:fld>
             <a:endParaRPr lang="en-US"/>
           </a:p>
@@ -9520,7 +9527,7 @@
             <a:fld id="{D86B3AB3-BDCC-41BF-8781-963E853753C3}" type="datetime1">
               <a:rPr lang="en-US" smtClean="0"/>
               <a:pPr/>
-              <a:t>8/19/2026</a:t>
+              <a:t>8/20/2026</a:t>
             </a:fld>
             <a:endParaRPr lang="en-US"/>
           </a:p>
@@ -10565,7 +10572,7 @@
             <a:fld id="{D86B3AB3-BDCC-41BF-8781-963E853753C3}" type="datetime1">
               <a:rPr lang="en-US" smtClean="0"/>
               <a:pPr/>
-              <a:t>8/19/2026</a:t>
+              <a:t>8/20/2026</a:t>
             </a:fld>
             <a:endParaRPr lang="en-US"/>
           </a:p>
@@ -12098,7 +12105,7 @@
             <a:fld id="{D86B3AB3-BDCC-41BF-8781-963E853753C3}" type="datetime1">
               <a:rPr lang="en-US" smtClean="0"/>
               <a:pPr/>
-              <a:t>8/19/2026</a:t>
+              <a:t>8/20/2026</a:t>
             </a:fld>
             <a:endParaRPr lang="en-US"/>
           </a:p>
@@ -13380,7 +13387,7 @@
             <a:fld id="{D86B3AB3-BDCC-41BF-8781-963E853753C3}" type="datetime1">
               <a:rPr lang="en-US" smtClean="0"/>
               <a:pPr/>
-              <a:t>8/19/2026</a:t>
+              <a:t>8/20/2026</a:t>
             </a:fld>
             <a:endParaRPr lang="en-US"/>
           </a:p>
@@ -14204,7 +14211,7 @@
             <a:fld id="{D86B3AB3-BDCC-41BF-8781-963E853753C3}" type="datetime1">
               <a:rPr lang="en-US" smtClean="0"/>
               <a:pPr/>
-              <a:t>8/19/2026</a:t>
+              <a:t>8/20/2026</a:t>
             </a:fld>
             <a:endParaRPr lang="en-US"/>
           </a:p>
@@ -15522,7 +15529,7 @@
             <a:fld id="{D86B3AB3-BDCC-41BF-8781-963E853753C3}" type="datetime1">
               <a:rPr lang="en-US" smtClean="0"/>
               <a:pPr/>
-              <a:t>8/19/2026</a:t>
+              <a:t>8/20/2026</a:t>
             </a:fld>
             <a:endParaRPr lang="en-US"/>
           </a:p>
@@ -16474,7 +16481,7 @@
             <a:fld id="{D86B3AB3-BDCC-41BF-8781-963E853753C3}" type="datetime1">
               <a:rPr lang="en-US" smtClean="0"/>
               <a:pPr/>
-              <a:t>8/19/2026</a:t>
+              <a:t>8/20/2026</a:t>
             </a:fld>
             <a:endParaRPr lang="en-US"/>
           </a:p>
@@ -17314,7 +17321,7 @@
             <a:fld id="{D86B3AB3-BDCC-41BF-8781-963E853753C3}" type="datetime1">
               <a:rPr lang="en-US" smtClean="0"/>
               <a:pPr/>
-              <a:t>8/19/2026</a:t>
+              <a:t>8/20/2026</a:t>
             </a:fld>
             <a:endParaRPr lang="en-US"/>
           </a:p>
@@ -18174,7 +18181,7 @@
             <a:fld id="{D86B3AB3-BDCC-41BF-8781-963E853753C3}" type="datetime1">
               <a:rPr lang="en-US" smtClean="0"/>
               <a:pPr/>
-              <a:t>8/19/2026</a:t>
+              <a:t>8/20/2026</a:t>
             </a:fld>
             <a:endParaRPr lang="en-US"/>
           </a:p>
@@ -18598,7 +18605,7 @@
             <a:fld id="{D86B3AB3-BDCC-41BF-8781-963E853753C3}" type="datetime1">
               <a:rPr lang="en-US" smtClean="0"/>
               <a:pPr/>
-              <a:t>8/19/2026</a:t>
+              <a:t>8/20/2026</a:t>
             </a:fld>
             <a:endParaRPr lang="en-US"/>
           </a:p>
@@ -19908,7 +19915,7 @@
             <a:fld id="{D86B3AB3-BDCC-41BF-8781-963E853753C3}" type="datetime1">
               <a:rPr lang="en-US" smtClean="0"/>
               <a:pPr/>
-              <a:t>8/19/2026</a:t>
+              <a:t>8/20/2026</a:t>
             </a:fld>
             <a:endParaRPr lang="en-US"/>
           </a:p>
@@ -23019,7 +23026,7 @@
             <a:fld id="{D86B3AB3-BDCC-41BF-8781-963E853753C3}" type="datetime1">
               <a:rPr lang="en-US" smtClean="0"/>
               <a:pPr/>
-              <a:t>8/19/2026</a:t>
+              <a:t>8/20/2026</a:t>
             </a:fld>
             <a:endParaRPr lang="en-US"/>
           </a:p>
@@ -26288,7 +26295,7 @@
             <a:fld id="{D86B3AB3-BDCC-41BF-8781-963E853753C3}" type="datetime1">
               <a:rPr lang="en-US" smtClean="0"/>
               <a:pPr/>
-              <a:t>8/19/2026</a:t>
+              <a:t>8/20/2026</a:t>
             </a:fld>
             <a:endParaRPr lang="en-US"/>
           </a:p>
@@ -27443,7 +27450,7 @@
             <a:fld id="{D86B3AB3-BDCC-41BF-8781-963E853753C3}" type="datetime1">
               <a:rPr lang="en-US" smtClean="0"/>
               <a:pPr/>
-              <a:t>8/19/2026</a:t>
+              <a:t>8/20/2026</a:t>
             </a:fld>
             <a:endParaRPr lang="en-US"/>
           </a:p>
@@ -28572,7 +28579,7 @@
             <a:fld id="{D86B3AB3-BDCC-41BF-8781-963E853753C3}" type="datetime1">
               <a:rPr lang="en-US" smtClean="0"/>
               <a:pPr/>
-              <a:t>8/19/2026</a:t>
+              <a:t>8/20/2026</a:t>
             </a:fld>
             <a:endParaRPr lang="en-US"/>
           </a:p>
@@ -32028,7 +32035,7 @@
             <a:fld id="{D86B3AB3-BDCC-41BF-8781-963E853753C3}" type="datetime1">
               <a:rPr lang="en-US" smtClean="0"/>
               <a:pPr/>
-              <a:t>8/19/2026</a:t>
+              <a:t>8/20/2026</a:t>
             </a:fld>
             <a:endParaRPr lang="en-US"/>
           </a:p>
@@ -33351,7 +33358,7 @@
             <a:fld id="{D86B3AB3-BDCC-41BF-8781-963E853753C3}" type="datetime1">
               <a:rPr lang="en-US" smtClean="0"/>
               <a:pPr/>
-              <a:t>8/19/2026</a:t>
+              <a:t>8/20/2026</a:t>
             </a:fld>
             <a:endParaRPr lang="en-US"/>
           </a:p>
@@ -34567,7 +34574,7 @@
             <a:fld id="{D86B3AB3-BDCC-41BF-8781-963E853753C3}" type="datetime1">
               <a:rPr lang="en-US" smtClean="0"/>
               <a:pPr/>
-              <a:t>8/19/2026</a:t>
+              <a:t>8/20/2026</a:t>
             </a:fld>
             <a:endParaRPr lang="en-US"/>
           </a:p>
@@ -35632,7 +35639,7 @@
             <a:fld id="{D86B3AB3-BDCC-41BF-8781-963E853753C3}" type="datetime1">
               <a:rPr lang="en-US" smtClean="0"/>
               <a:pPr/>
-              <a:t>8/19/2026</a:t>
+              <a:t>8/20/2026</a:t>
             </a:fld>
             <a:endParaRPr lang="en-US"/>
           </a:p>
@@ -36643,7 +36650,7 @@
             <a:fld id="{D86B3AB3-BDCC-41BF-8781-963E853753C3}" type="datetime1">
               <a:rPr lang="en-US" smtClean="0"/>
               <a:pPr/>
-              <a:t>8/19/2026</a:t>
+              <a:t>8/20/2026</a:t>
             </a:fld>
             <a:endParaRPr lang="en-US"/>
           </a:p>
@@ -37687,7 +37694,7 @@
             <a:fld id="{D86B3AB3-BDCC-41BF-8781-963E853753C3}" type="datetime1">
               <a:rPr lang="en-US" smtClean="0"/>
               <a:pPr/>
-              <a:t>8/19/2026</a:t>
+              <a:t>8/20/2026</a:t>
             </a:fld>
             <a:endParaRPr lang="en-US"/>
           </a:p>
@@ -38825,7 +38832,7 @@
             <a:fld id="{D86B3AB3-BDCC-41BF-8781-963E853753C3}" type="datetime1">
               <a:rPr lang="en-US" smtClean="0"/>
               <a:pPr/>
-              <a:t>8/19/2026</a:t>
+              <a:t>8/20/2026</a:t>
             </a:fld>
             <a:endParaRPr lang="en-US"/>
           </a:p>
@@ -39216,7 +39223,7 @@
             <a:fld id="{00D1CE85-AA59-46D7-98F4-301D80B40614}" type="datetimeFigureOut">
               <a:rPr lang="en-US" smtClean="0"/>
               <a:pPr/>
-              <a:t>8/19/2026</a:t>
+              <a:t>8/20/2026</a:t>
             </a:fld>
             <a:endParaRPr lang="en-US"/>
           </a:p>
@@ -39758,6 +39765,266 @@
       </p:grpSpPr>
       <p:sp>
         <p:nvSpPr>
+          <p:cNvPr id="4" name="Title 3">
+            <a:extLst>
+              <a:ext uri="{FF2B5EF4-FFF2-40B4-BE49-F238E27FC236}">
+                <a16:creationId xmlns:a16="http://schemas.microsoft.com/office/drawing/2014/main" id="{1D8EBF9F-2BAC-9E30-FDF7-F09547A89C3A}"/>
+              </a:ext>
+            </a:extLst>
+          </p:cNvPr>
+          <p:cNvSpPr>
+            <a:spLocks noGrp="1"/>
+          </p:cNvSpPr>
+          <p:nvPr>
+            <p:ph type="ctrTitle"/>
+          </p:nvPr>
+        </p:nvSpPr>
+        <p:spPr/>
+        <p:txBody>
+          <a:bodyPr/>
+          <a:lstStyle/>
+          <a:p>
+            <a:endParaRPr lang="en-US"/>
+          </a:p>
+        </p:txBody>
+      </p:sp>
+      <p:sp>
+        <p:nvSpPr>
+          <p:cNvPr id="5" name="Subtitle 4">
+            <a:extLst>
+              <a:ext uri="{FF2B5EF4-FFF2-40B4-BE49-F238E27FC236}">
+                <a16:creationId xmlns:a16="http://schemas.microsoft.com/office/drawing/2014/main" id="{3C4A362E-937E-69DB-344A-0ABB82ECFE06}"/>
+              </a:ext>
+            </a:extLst>
+          </p:cNvPr>
+          <p:cNvSpPr>
+            <a:spLocks noGrp="1"/>
+          </p:cNvSpPr>
+          <p:nvPr>
+            <p:ph type="subTitle" idx="1"/>
+          </p:nvPr>
+        </p:nvSpPr>
+        <p:spPr/>
+        <p:txBody>
+          <a:bodyPr/>
+          <a:lstStyle/>
+          <a:p>
+            <a:endParaRPr lang="en-US"/>
+          </a:p>
+        </p:txBody>
+      </p:sp>
+      <p:sp>
+        <p:nvSpPr>
+          <p:cNvPr id="6" name="Content Placeholder 5">
+            <a:extLst>
+              <a:ext uri="{FF2B5EF4-FFF2-40B4-BE49-F238E27FC236}">
+                <a16:creationId xmlns:a16="http://schemas.microsoft.com/office/drawing/2014/main" id="{DC4D183A-9405-1B18-BAE7-D23D6EF86888}"/>
+              </a:ext>
+            </a:extLst>
+          </p:cNvPr>
+          <p:cNvSpPr>
+            <a:spLocks noGrp="1"/>
+          </p:cNvSpPr>
+          <p:nvPr>
+            <p:ph sz="quarter" idx="12"/>
+          </p:nvPr>
+        </p:nvSpPr>
+        <p:spPr/>
+        <p:txBody>
+          <a:bodyPr/>
+          <a:lstStyle/>
+          <a:p>
+            <a:endParaRPr lang="en-US"/>
+          </a:p>
+        </p:txBody>
+      </p:sp>
+    </p:spTree>
+    <p:extLst>
+      <p:ext uri="{BB962C8B-B14F-4D97-AF65-F5344CB8AC3E}">
+        <p14:creationId xmlns:p14="http://schemas.microsoft.com/office/powerpoint/2010/main" val="293118606"/>
+      </p:ext>
+    </p:extLst>
+  </p:cSld>
+  <p:clrMapOvr>
+    <a:masterClrMapping/>
+  </p:clrMapOvr>
+</p:sld>
+</file>
+
+<file path=ppt/slides/slide11.xml><?xml version="1.0" encoding="utf-8"?>
+<p:sld xmlns:a="http://schemas.openxmlformats.org/drawingml/2006/main" xmlns:r="http://schemas.openxmlformats.org/officeDocument/2006/relationships" xmlns:p="http://schemas.openxmlformats.org/presentationml/2006/main">
+  <p:cSld>
+    <p:spTree>
+      <p:nvGrpSpPr>
+        <p:cNvPr id="1" name=""/>
+        <p:cNvGrpSpPr/>
+        <p:nvPr/>
+      </p:nvGrpSpPr>
+      <p:grpSpPr>
+        <a:xfrm>
+          <a:off x="0" y="0"/>
+          <a:ext cx="0" cy="0"/>
+          <a:chOff x="0" y="0"/>
+          <a:chExt cx="0" cy="0"/>
+        </a:xfrm>
+      </p:grpSpPr>
+      <p:sp>
+        <p:nvSpPr>
+          <p:cNvPr id="2" name="Title 1">
+            <a:extLst>
+              <a:ext uri="{FF2B5EF4-FFF2-40B4-BE49-F238E27FC236}">
+                <a16:creationId xmlns:a16="http://schemas.microsoft.com/office/drawing/2014/main" id="{F13F27A9-2D24-7DD4-711A-8CB14A03C54A}"/>
+              </a:ext>
+            </a:extLst>
+          </p:cNvPr>
+          <p:cNvSpPr>
+            <a:spLocks noGrp="1"/>
+          </p:cNvSpPr>
+          <p:nvPr>
+            <p:ph type="ctrTitle"/>
+          </p:nvPr>
+        </p:nvSpPr>
+        <p:spPr/>
+        <p:txBody>
+          <a:bodyPr/>
+          <a:lstStyle/>
+          <a:p>
+            <a:endParaRPr lang="en-US"/>
+          </a:p>
+        </p:txBody>
+      </p:sp>
+      <p:sp>
+        <p:nvSpPr>
+          <p:cNvPr id="3" name="Subtitle 2">
+            <a:extLst>
+              <a:ext uri="{FF2B5EF4-FFF2-40B4-BE49-F238E27FC236}">
+                <a16:creationId xmlns:a16="http://schemas.microsoft.com/office/drawing/2014/main" id="{37C92DC9-95C6-3F7E-358C-74EA3AFBDE35}"/>
+              </a:ext>
+            </a:extLst>
+          </p:cNvPr>
+          <p:cNvSpPr>
+            <a:spLocks noGrp="1"/>
+          </p:cNvSpPr>
+          <p:nvPr>
+            <p:ph type="subTitle" idx="1"/>
+          </p:nvPr>
+        </p:nvSpPr>
+        <p:spPr/>
+        <p:txBody>
+          <a:bodyPr/>
+          <a:lstStyle/>
+          <a:p>
+            <a:endParaRPr lang="en-US"/>
+          </a:p>
+        </p:txBody>
+      </p:sp>
+      <p:sp>
+        <p:nvSpPr>
+          <p:cNvPr id="4" name="Picture Placeholder 3">
+            <a:extLst>
+              <a:ext uri="{FF2B5EF4-FFF2-40B4-BE49-F238E27FC236}">
+                <a16:creationId xmlns:a16="http://schemas.microsoft.com/office/drawing/2014/main" id="{6F88E9EB-6098-7FA2-3FE3-73843C616046}"/>
+              </a:ext>
+            </a:extLst>
+          </p:cNvPr>
+          <p:cNvSpPr>
+            <a:spLocks noGrp="1"/>
+          </p:cNvSpPr>
+          <p:nvPr>
+            <p:ph type="pic" sz="quarter" idx="12"/>
+          </p:nvPr>
+        </p:nvSpPr>
+        <p:spPr/>
+        <p:txBody>
+          <a:bodyPr/>
+          <a:lstStyle/>
+          <a:p>
+            <a:endParaRPr lang="en-US"/>
+          </a:p>
+        </p:txBody>
+      </p:sp>
+      <p:sp>
+        <p:nvSpPr>
+          <p:cNvPr id="5" name="Picture Placeholder 4">
+            <a:extLst>
+              <a:ext uri="{FF2B5EF4-FFF2-40B4-BE49-F238E27FC236}">
+                <a16:creationId xmlns:a16="http://schemas.microsoft.com/office/drawing/2014/main" id="{07D34A94-EE84-38E4-F7AF-2FE7FC5F9506}"/>
+              </a:ext>
+            </a:extLst>
+          </p:cNvPr>
+          <p:cNvSpPr>
+            <a:spLocks noGrp="1"/>
+          </p:cNvSpPr>
+          <p:nvPr>
+            <p:ph type="pic" sz="quarter" idx="13"/>
+          </p:nvPr>
+        </p:nvSpPr>
+        <p:spPr/>
+        <p:txBody>
+          <a:bodyPr/>
+          <a:lstStyle/>
+          <a:p>
+            <a:endParaRPr lang="en-US"/>
+          </a:p>
+        </p:txBody>
+      </p:sp>
+      <p:sp>
+        <p:nvSpPr>
+          <p:cNvPr id="6" name="Picture Placeholder 5">
+            <a:extLst>
+              <a:ext uri="{FF2B5EF4-FFF2-40B4-BE49-F238E27FC236}">
+                <a16:creationId xmlns:a16="http://schemas.microsoft.com/office/drawing/2014/main" id="{71C5B678-ACF6-FE90-8CFB-3B621A94E63F}"/>
+              </a:ext>
+            </a:extLst>
+          </p:cNvPr>
+          <p:cNvSpPr>
+            <a:spLocks noGrp="1"/>
+          </p:cNvSpPr>
+          <p:nvPr>
+            <p:ph type="pic" sz="quarter" idx="14"/>
+          </p:nvPr>
+        </p:nvSpPr>
+        <p:spPr/>
+        <p:txBody>
+          <a:bodyPr/>
+          <a:lstStyle/>
+          <a:p>
+            <a:endParaRPr lang="en-US"/>
+          </a:p>
+        </p:txBody>
+      </p:sp>
+    </p:spTree>
+    <p:extLst>
+      <p:ext uri="{BB962C8B-B14F-4D97-AF65-F5344CB8AC3E}">
+        <p14:creationId xmlns:p14="http://schemas.microsoft.com/office/powerpoint/2010/main" val="902549347"/>
+      </p:ext>
+    </p:extLst>
+  </p:cSld>
+  <p:clrMapOvr>
+    <a:masterClrMapping/>
+  </p:clrMapOvr>
+</p:sld>
+</file>
+
+<file path=ppt/slides/slide12.xml><?xml version="1.0" encoding="utf-8"?>
+<p:sld xmlns:a="http://schemas.openxmlformats.org/drawingml/2006/main" xmlns:r="http://schemas.openxmlformats.org/officeDocument/2006/relationships" xmlns:p="http://schemas.openxmlformats.org/presentationml/2006/main">
+  <p:cSld>
+    <p:spTree>
+      <p:nvGrpSpPr>
+        <p:cNvPr id="1" name=""/>
+        <p:cNvGrpSpPr/>
+        <p:nvPr/>
+      </p:nvGrpSpPr>
+      <p:grpSpPr>
+        <a:xfrm>
+          <a:off x="0" y="0"/>
+          <a:ext cx="0" cy="0"/>
+          <a:chOff x="0" y="0"/>
+          <a:chExt cx="0" cy="0"/>
+        </a:xfrm>
+      </p:grpSpPr>
+      <p:sp>
+        <p:nvSpPr>
           <p:cNvPr id="2" name="Picture Placeholder 1">
             <a:extLst>
               <a:ext uri="{FF2B5EF4-FFF2-40B4-BE49-F238E27FC236}">
@@ -39844,7 +40111,7 @@
 </p:sld>
 </file>
 
-<file path=ppt/slides/slide11.xml><?xml version="1.0" encoding="utf-8"?>
+<file path=ppt/slides/slide13.xml><?xml version="1.0" encoding="utf-8"?>
 <p:sld xmlns:a="http://schemas.openxmlformats.org/drawingml/2006/main" xmlns:r="http://schemas.openxmlformats.org/officeDocument/2006/relationships" xmlns:p="http://schemas.openxmlformats.org/presentationml/2006/main">
   <p:cSld>
     <p:spTree>
@@ -39949,7 +40216,7 @@
 </p:sld>
 </file>
 
-<file path=ppt/slides/slide12.xml><?xml version="1.0" encoding="utf-8"?>
+<file path=ppt/slides/slide14.xml><?xml version="1.0" encoding="utf-8"?>
 <p:sld xmlns:a="http://schemas.openxmlformats.org/drawingml/2006/main" xmlns:r="http://schemas.openxmlformats.org/officeDocument/2006/relationships" xmlns:p="http://schemas.openxmlformats.org/presentationml/2006/main">
   <p:cSld>
     <p:spTree>
@@ -40680,7 +40947,15 @@
             </a:r>
             <a:r>
               <a:rPr lang="en-US" dirty="0"/>
-              <a:t> 2</a:t>
+              <a:t> 2 </a:t>
+            </a:r>
+            <a:r>
+              <a:rPr lang="en-US" dirty="0" err="1"/>
+              <a:t>và</a:t>
+            </a:r>
+            <a:r>
+              <a:rPr lang="en-US" dirty="0"/>
+              <a:t> 3</a:t>
             </a:r>
           </a:p>
         </p:txBody>
@@ -40775,17 +41050,17 @@
             </a:r>
             <a:r>
               <a:rPr lang="en-US" dirty="0"/>
-              <a:t> 3</a:t>
+              <a:t> 2</a:t>
             </a:r>
           </a:p>
         </p:txBody>
       </p:sp>
       <p:pic>
         <p:nvPicPr>
-          <p:cNvPr id="5" name="Content Placeholder 4">
+          <p:cNvPr id="12" name="Content Placeholder 11">
             <a:extLst>
               <a:ext uri="{FF2B5EF4-FFF2-40B4-BE49-F238E27FC236}">
-                <a16:creationId xmlns:a16="http://schemas.microsoft.com/office/drawing/2014/main" id="{9B7D2C06-8D1B-423A-A6D3-8185C16B0F5A}"/>
+                <a16:creationId xmlns:a16="http://schemas.microsoft.com/office/drawing/2014/main" id="{BCD4E9AE-F1EB-4A3B-885B-558F22BFF71C}"/>
               </a:ext>
             </a:extLst>
           </p:cNvPr>
@@ -40804,39 +41079,9 @@
         </p:blipFill>
         <p:spPr>
           <a:xfrm>
-            <a:off x="838200" y="1966435"/>
-            <a:ext cx="10515600" cy="4069718"/>
+            <a:off x="687418" y="1386354"/>
+            <a:ext cx="10590182" cy="4300177"/>
           </a:xfrm>
-        </p:spPr>
-      </p:pic>
-      <p:pic>
-        <p:nvPicPr>
-          <p:cNvPr id="6" name="Content Placeholder 4">
-            <a:extLst>
-              <a:ext uri="{FF2B5EF4-FFF2-40B4-BE49-F238E27FC236}">
-                <a16:creationId xmlns:a16="http://schemas.microsoft.com/office/drawing/2014/main" id="{2925E3DB-CA99-47BB-8D6B-FDC97A9B0911}"/>
-              </a:ext>
-            </a:extLst>
-          </p:cNvPr>
-          <p:cNvPicPr>
-            <a:picLocks noChangeAspect="1"/>
-          </p:cNvPicPr>
-          <p:nvPr/>
-        </p:nvPicPr>
-        <p:blipFill>
-          <a:blip r:embed="rId2"/>
-          <a:stretch>
-            <a:fillRect/>
-          </a:stretch>
-        </p:blipFill>
-        <p:spPr>
-          <a:xfrm>
-            <a:off x="838200" y="1993329"/>
-            <a:ext cx="10515600" cy="4069718"/>
-          </a:xfrm>
-          <a:prstGeom prst="rect">
-            <a:avLst/>
-          </a:prstGeom>
         </p:spPr>
       </p:pic>
     </p:spTree>
@@ -40853,6 +41098,1484 @@
 </file>
 
 <file path=ppt/slides/slide6.xml><?xml version="1.0" encoding="utf-8"?>
+<p:sld xmlns:a="http://schemas.openxmlformats.org/drawingml/2006/main" xmlns:r="http://schemas.openxmlformats.org/officeDocument/2006/relationships" xmlns:p="http://schemas.openxmlformats.org/presentationml/2006/main">
+  <p:cSld>
+    <p:spTree>
+      <p:nvGrpSpPr>
+        <p:cNvPr id="1" name=""/>
+        <p:cNvGrpSpPr/>
+        <p:nvPr/>
+      </p:nvGrpSpPr>
+      <p:grpSpPr>
+        <a:xfrm>
+          <a:off x="0" y="0"/>
+          <a:ext cx="0" cy="0"/>
+          <a:chOff x="0" y="0"/>
+          <a:chExt cx="0" cy="0"/>
+        </a:xfrm>
+      </p:grpSpPr>
+      <p:sp>
+        <p:nvSpPr>
+          <p:cNvPr id="2" name="Title 1">
+            <a:extLst>
+              <a:ext uri="{FF2B5EF4-FFF2-40B4-BE49-F238E27FC236}">
+                <a16:creationId xmlns:a16="http://schemas.microsoft.com/office/drawing/2014/main" id="{14E1C98C-59A6-490B-83BD-EE1E10A5BA9A}"/>
+              </a:ext>
+            </a:extLst>
+          </p:cNvPr>
+          <p:cNvSpPr>
+            <a:spLocks noGrp="1"/>
+          </p:cNvSpPr>
+          <p:nvPr>
+            <p:ph type="title"/>
+          </p:nvPr>
+        </p:nvSpPr>
+        <p:spPr/>
+        <p:txBody>
+          <a:bodyPr/>
+          <a:lstStyle/>
+          <a:p>
+            <a:r>
+              <a:rPr lang="en-US" dirty="0"/>
+              <a:t>Pipeline </a:t>
+            </a:r>
+            <a:r>
+              <a:rPr lang="en-US" dirty="0" err="1"/>
+              <a:t>nhóm</a:t>
+            </a:r>
+            <a:r>
+              <a:rPr lang="en-US" dirty="0"/>
+              <a:t> 3</a:t>
+            </a:r>
+          </a:p>
+        </p:txBody>
+      </p:sp>
+      <p:pic>
+        <p:nvPicPr>
+          <p:cNvPr id="8" name="Content Placeholder 7">
+            <a:extLst>
+              <a:ext uri="{FF2B5EF4-FFF2-40B4-BE49-F238E27FC236}">
+                <a16:creationId xmlns:a16="http://schemas.microsoft.com/office/drawing/2014/main" id="{F97BBF4E-75C3-4ABB-B718-D7296A1D056A}"/>
+              </a:ext>
+            </a:extLst>
+          </p:cNvPr>
+          <p:cNvPicPr>
+            <a:picLocks noGrp="1" noChangeAspect="1"/>
+          </p:cNvPicPr>
+          <p:nvPr>
+            <p:ph idx="1"/>
+          </p:nvPr>
+        </p:nvPicPr>
+        <p:blipFill>
+          <a:blip r:embed="rId2"/>
+          <a:stretch>
+            <a:fillRect/>
+          </a:stretch>
+        </p:blipFill>
+        <p:spPr>
+          <a:xfrm>
+            <a:off x="411623" y="1368425"/>
+            <a:ext cx="9996401" cy="4351338"/>
+          </a:xfrm>
+        </p:spPr>
+      </p:pic>
+    </p:spTree>
+    <p:extLst>
+      <p:ext uri="{BB962C8B-B14F-4D97-AF65-F5344CB8AC3E}">
+        <p14:creationId xmlns:p14="http://schemas.microsoft.com/office/powerpoint/2010/main" val="790382300"/>
+      </p:ext>
+    </p:extLst>
+  </p:cSld>
+  <p:clrMapOvr>
+    <a:masterClrMapping/>
+  </p:clrMapOvr>
+</p:sld>
+</file>
+
+<file path=ppt/slides/slide7.xml><?xml version="1.0" encoding="utf-8"?>
+<p:sld xmlns:a="http://schemas.openxmlformats.org/drawingml/2006/main" xmlns:r="http://schemas.openxmlformats.org/officeDocument/2006/relationships" xmlns:p="http://schemas.openxmlformats.org/presentationml/2006/main">
+  <p:cSld>
+    <p:spTree>
+      <p:nvGrpSpPr>
+        <p:cNvPr id="1" name=""/>
+        <p:cNvGrpSpPr/>
+        <p:nvPr/>
+      </p:nvGrpSpPr>
+      <p:grpSpPr>
+        <a:xfrm>
+          <a:off x="0" y="0"/>
+          <a:ext cx="0" cy="0"/>
+          <a:chOff x="0" y="0"/>
+          <a:chExt cx="0" cy="0"/>
+        </a:xfrm>
+      </p:grpSpPr>
+      <p:sp>
+        <p:nvSpPr>
+          <p:cNvPr id="2" name="Title 1">
+            <a:extLst>
+              <a:ext uri="{FF2B5EF4-FFF2-40B4-BE49-F238E27FC236}">
+                <a16:creationId xmlns:a16="http://schemas.microsoft.com/office/drawing/2014/main" id="{14E1C98C-59A6-490B-83BD-EE1E10A5BA9A}"/>
+              </a:ext>
+            </a:extLst>
+          </p:cNvPr>
+          <p:cNvSpPr>
+            <a:spLocks noGrp="1"/>
+          </p:cNvSpPr>
+          <p:nvPr>
+            <p:ph type="title"/>
+          </p:nvPr>
+        </p:nvSpPr>
+        <p:spPr/>
+        <p:txBody>
+          <a:bodyPr/>
+          <a:lstStyle/>
+          <a:p>
+            <a:r>
+              <a:rPr lang="en-US" dirty="0" err="1"/>
+              <a:t>Kết</a:t>
+            </a:r>
+            <a:r>
+              <a:rPr lang="en-US" dirty="0"/>
+              <a:t> </a:t>
+            </a:r>
+            <a:r>
+              <a:rPr lang="en-US" dirty="0" err="1"/>
+              <a:t>quả</a:t>
+            </a:r>
+            <a:r>
+              <a:rPr lang="en-US" dirty="0"/>
+              <a:t> </a:t>
+            </a:r>
+            <a:r>
+              <a:rPr lang="en-US" dirty="0" err="1"/>
+              <a:t>thực</a:t>
+            </a:r>
+            <a:r>
+              <a:rPr lang="en-US" dirty="0"/>
+              <a:t> </a:t>
+            </a:r>
+            <a:r>
+              <a:rPr lang="en-US" dirty="0" err="1"/>
+              <a:t>nghiệm</a:t>
+            </a:r>
+            <a:endParaRPr lang="en-US" dirty="0"/>
+          </a:p>
+        </p:txBody>
+      </p:sp>
+      <p:graphicFrame>
+        <p:nvGraphicFramePr>
+          <p:cNvPr id="7" name="Content Placeholder 6">
+            <a:extLst>
+              <a:ext uri="{FF2B5EF4-FFF2-40B4-BE49-F238E27FC236}">
+                <a16:creationId xmlns:a16="http://schemas.microsoft.com/office/drawing/2014/main" id="{80B94240-1869-4516-836D-46C116A9187C}"/>
+              </a:ext>
+            </a:extLst>
+          </p:cNvPr>
+          <p:cNvGraphicFramePr>
+            <a:graphicFrameLocks noGrp="1"/>
+          </p:cNvGraphicFramePr>
+          <p:nvPr>
+            <p:ph idx="1"/>
+            <p:extLst>
+              <p:ext uri="{D42A27DB-BD31-4B8C-83A1-F6EECF244321}">
+                <p14:modId xmlns:p14="http://schemas.microsoft.com/office/powerpoint/2010/main" val="4023077667"/>
+              </p:ext>
+            </p:extLst>
+          </p:nvPr>
+        </p:nvGraphicFramePr>
+        <p:xfrm>
+          <a:off x="537882" y="1111624"/>
+          <a:ext cx="11376210" cy="5145743"/>
+        </p:xfrm>
+        <a:graphic>
+          <a:graphicData uri="http://schemas.openxmlformats.org/drawingml/2006/table">
+            <a:tbl>
+              <a:tblPr firstRow="1" firstCol="1" bandRow="1">
+                <a:tableStyleId>{5C22544A-7EE6-4342-B048-85BDC9FD1C3A}</a:tableStyleId>
+              </a:tblPr>
+              <a:tblGrid>
+                <a:gridCol w="3387667">
+                  <a:extLst>
+                    <a:ext uri="{9D8B030D-6E8A-4147-A177-3AD203B41FA5}">
+                      <a16:colId xmlns:a16="http://schemas.microsoft.com/office/drawing/2014/main" val="4011931582"/>
+                    </a:ext>
+                  </a:extLst>
+                </a:gridCol>
+                <a:gridCol w="2752480">
+                  <a:extLst>
+                    <a:ext uri="{9D8B030D-6E8A-4147-A177-3AD203B41FA5}">
+                      <a16:colId xmlns:a16="http://schemas.microsoft.com/office/drawing/2014/main" val="1827231734"/>
+                    </a:ext>
+                  </a:extLst>
+                </a:gridCol>
+                <a:gridCol w="2377719">
+                  <a:extLst>
+                    <a:ext uri="{9D8B030D-6E8A-4147-A177-3AD203B41FA5}">
+                      <a16:colId xmlns:a16="http://schemas.microsoft.com/office/drawing/2014/main" val="4198138540"/>
+                    </a:ext>
+                  </a:extLst>
+                </a:gridCol>
+                <a:gridCol w="2858344">
+                  <a:extLst>
+                    <a:ext uri="{9D8B030D-6E8A-4147-A177-3AD203B41FA5}">
+                      <a16:colId xmlns:a16="http://schemas.microsoft.com/office/drawing/2014/main" val="1525114488"/>
+                    </a:ext>
+                  </a:extLst>
+                </a:gridCol>
+              </a:tblGrid>
+              <a:tr h="344067">
+                <a:tc>
+                  <a:txBody>
+                    <a:bodyPr/>
+                    <a:lstStyle/>
+                    <a:p>
+                      <a:pPr marL="0" marR="0" indent="360045" algn="ctr">
+                        <a:lnSpc>
+                          <a:spcPct val="120000"/>
+                        </a:lnSpc>
+                        <a:spcBef>
+                          <a:spcPts val="600"/>
+                        </a:spcBef>
+                        <a:spcAft>
+                          <a:spcPts val="0"/>
+                        </a:spcAft>
+                      </a:pPr>
+                      <a:r>
+                        <a:rPr lang="en-US" sz="1500" dirty="0" err="1">
+                          <a:effectLst/>
+                          <a:latin typeface="Tahoma" panose="020B0604030504040204" pitchFamily="34" charset="0"/>
+                          <a:ea typeface="Tahoma" panose="020B0604030504040204" pitchFamily="34" charset="0"/>
+                          <a:cs typeface="Tahoma" panose="020B0604030504040204" pitchFamily="34" charset="0"/>
+                        </a:rPr>
+                        <a:t>Mô</a:t>
+                      </a:r>
+                      <a:r>
+                        <a:rPr lang="en-US" sz="1500" dirty="0">
+                          <a:effectLst/>
+                          <a:latin typeface="Tahoma" panose="020B0604030504040204" pitchFamily="34" charset="0"/>
+                          <a:ea typeface="Tahoma" panose="020B0604030504040204" pitchFamily="34" charset="0"/>
+                          <a:cs typeface="Tahoma" panose="020B0604030504040204" pitchFamily="34" charset="0"/>
+                        </a:rPr>
+                        <a:t> </a:t>
+                      </a:r>
+                      <a:r>
+                        <a:rPr lang="en-US" sz="1500" dirty="0" err="1">
+                          <a:effectLst/>
+                          <a:latin typeface="Tahoma" panose="020B0604030504040204" pitchFamily="34" charset="0"/>
+                          <a:ea typeface="Tahoma" panose="020B0604030504040204" pitchFamily="34" charset="0"/>
+                          <a:cs typeface="Tahoma" panose="020B0604030504040204" pitchFamily="34" charset="0"/>
+                        </a:rPr>
+                        <a:t>hình</a:t>
+                      </a:r>
+                      <a:endParaRPr lang="en-US" sz="1500" dirty="0">
+                        <a:effectLst/>
+                        <a:latin typeface="Tahoma" panose="020B0604030504040204" pitchFamily="34" charset="0"/>
+                        <a:ea typeface="Tahoma" panose="020B0604030504040204" pitchFamily="34" charset="0"/>
+                        <a:cs typeface="Tahoma" panose="020B0604030504040204" pitchFamily="34" charset="0"/>
+                      </a:endParaRPr>
+                    </a:p>
+                  </a:txBody>
+                  <a:tcPr marL="40591" marR="40591" marT="24355" marB="24355"/>
+                </a:tc>
+                <a:tc>
+                  <a:txBody>
+                    <a:bodyPr/>
+                    <a:lstStyle/>
+                    <a:p>
+                      <a:pPr marL="0" marR="0" indent="360045" algn="ctr">
+                        <a:lnSpc>
+                          <a:spcPct val="120000"/>
+                        </a:lnSpc>
+                        <a:spcBef>
+                          <a:spcPts val="600"/>
+                        </a:spcBef>
+                        <a:spcAft>
+                          <a:spcPts val="0"/>
+                        </a:spcAft>
+                      </a:pPr>
+                      <a:r>
+                        <a:rPr lang="en-US" sz="1500">
+                          <a:effectLst/>
+                          <a:latin typeface="Tahoma" panose="020B0604030504040204" pitchFamily="34" charset="0"/>
+                          <a:ea typeface="Tahoma" panose="020B0604030504040204" pitchFamily="34" charset="0"/>
+                          <a:cs typeface="Tahoma" panose="020B0604030504040204" pitchFamily="34" charset="0"/>
+                        </a:rPr>
+                        <a:t>Bài báo</a:t>
+                      </a:r>
+                    </a:p>
+                  </a:txBody>
+                  <a:tcPr marL="40591" marR="40591" marT="24355" marB="24355"/>
+                </a:tc>
+                <a:tc>
+                  <a:txBody>
+                    <a:bodyPr/>
+                    <a:lstStyle/>
+                    <a:p>
+                      <a:pPr marL="0" marR="0" indent="360045" algn="ctr">
+                        <a:lnSpc>
+                          <a:spcPct val="120000"/>
+                        </a:lnSpc>
+                        <a:spcBef>
+                          <a:spcPts val="600"/>
+                        </a:spcBef>
+                        <a:spcAft>
+                          <a:spcPts val="0"/>
+                        </a:spcAft>
+                      </a:pPr>
+                      <a:r>
+                        <a:rPr lang="en-US" sz="1500">
+                          <a:effectLst/>
+                          <a:latin typeface="Tahoma" panose="020B0604030504040204" pitchFamily="34" charset="0"/>
+                          <a:ea typeface="Tahoma" panose="020B0604030504040204" pitchFamily="34" charset="0"/>
+                          <a:cs typeface="Tahoma" panose="020B0604030504040204" pitchFamily="34" charset="0"/>
+                        </a:rPr>
+                        <a:t>F1-minority (%)</a:t>
+                      </a:r>
+                    </a:p>
+                  </a:txBody>
+                  <a:tcPr marL="40591" marR="40591" marT="24355" marB="24355"/>
+                </a:tc>
+                <a:tc>
+                  <a:txBody>
+                    <a:bodyPr/>
+                    <a:lstStyle/>
+                    <a:p>
+                      <a:pPr marL="0" marR="0" indent="360045" algn="ctr">
+                        <a:lnSpc>
+                          <a:spcPct val="120000"/>
+                        </a:lnSpc>
+                        <a:spcBef>
+                          <a:spcPts val="600"/>
+                        </a:spcBef>
+                        <a:spcAft>
+                          <a:spcPts val="0"/>
+                        </a:spcAft>
+                      </a:pPr>
+                      <a:r>
+                        <a:rPr lang="en-US" sz="1500">
+                          <a:effectLst/>
+                          <a:latin typeface="Tahoma" panose="020B0604030504040204" pitchFamily="34" charset="0"/>
+                          <a:ea typeface="Tahoma" panose="020B0604030504040204" pitchFamily="34" charset="0"/>
+                          <a:cs typeface="Tahoma" panose="020B0604030504040204" pitchFamily="34" charset="0"/>
+                        </a:rPr>
+                        <a:t>Ghi chú</a:t>
+                      </a:r>
+                    </a:p>
+                  </a:txBody>
+                  <a:tcPr marL="40591" marR="40591" marT="24355" marB="24355"/>
+                </a:tc>
+                <a:extLst>
+                  <a:ext uri="{0D108BD9-81ED-4DB2-BD59-A6C34878D82A}">
+                    <a16:rowId xmlns:a16="http://schemas.microsoft.com/office/drawing/2014/main" val="2156125050"/>
+                  </a:ext>
+                </a:extLst>
+              </a:tr>
+              <a:tr h="570591">
+                <a:tc>
+                  <a:txBody>
+                    <a:bodyPr/>
+                    <a:lstStyle/>
+                    <a:p>
+                      <a:pPr marL="0" marR="0" indent="360045" algn="ctr">
+                        <a:lnSpc>
+                          <a:spcPct val="120000"/>
+                        </a:lnSpc>
+                        <a:spcBef>
+                          <a:spcPts val="600"/>
+                        </a:spcBef>
+                        <a:spcAft>
+                          <a:spcPts val="0"/>
+                        </a:spcAft>
+                      </a:pPr>
+                      <a:r>
+                        <a:rPr lang="en-US" sz="1500" dirty="0">
+                          <a:effectLst/>
+                          <a:latin typeface="Tahoma" panose="020B0604030504040204" pitchFamily="34" charset="0"/>
+                          <a:ea typeface="Tahoma" panose="020B0604030504040204" pitchFamily="34" charset="0"/>
+                          <a:cs typeface="Tahoma" panose="020B0604030504040204" pitchFamily="34" charset="0"/>
+                        </a:rPr>
+                        <a:t>GFP (</a:t>
+                      </a:r>
+                      <a:r>
+                        <a:rPr lang="en-US" sz="1500" dirty="0" err="1">
+                          <a:effectLst/>
+                          <a:latin typeface="Tahoma" panose="020B0604030504040204" pitchFamily="34" charset="0"/>
+                          <a:ea typeface="Tahoma" panose="020B0604030504040204" pitchFamily="34" charset="0"/>
+                          <a:cs typeface="Tahoma" panose="020B0604030504040204" pitchFamily="34" charset="0"/>
+                        </a:rPr>
+                        <a:t>kết</a:t>
+                      </a:r>
+                      <a:r>
+                        <a:rPr lang="en-US" sz="1500" dirty="0">
+                          <a:effectLst/>
+                          <a:latin typeface="Tahoma" panose="020B0604030504040204" pitchFamily="34" charset="0"/>
+                          <a:ea typeface="Tahoma" panose="020B0604030504040204" pitchFamily="34" charset="0"/>
+                          <a:cs typeface="Tahoma" panose="020B0604030504040204" pitchFamily="34" charset="0"/>
+                        </a:rPr>
+                        <a:t> </a:t>
+                      </a:r>
+                      <a:r>
+                        <a:rPr lang="en-US" sz="1500" dirty="0" err="1">
+                          <a:effectLst/>
+                          <a:latin typeface="Tahoma" panose="020B0604030504040204" pitchFamily="34" charset="0"/>
+                          <a:ea typeface="Tahoma" panose="020B0604030504040204" pitchFamily="34" charset="0"/>
+                          <a:cs typeface="Tahoma" panose="020B0604030504040204" pitchFamily="34" charset="0"/>
+                        </a:rPr>
+                        <a:t>quả</a:t>
+                      </a:r>
+                      <a:r>
+                        <a:rPr lang="en-US" sz="1500" dirty="0">
+                          <a:effectLst/>
+                          <a:latin typeface="Tahoma" panose="020B0604030504040204" pitchFamily="34" charset="0"/>
+                          <a:ea typeface="Tahoma" panose="020B0604030504040204" pitchFamily="34" charset="0"/>
+                          <a:cs typeface="Tahoma" panose="020B0604030504040204" pitchFamily="34" charset="0"/>
+                        </a:rPr>
+                        <a:t> </a:t>
+                      </a:r>
+                      <a:r>
+                        <a:rPr lang="en-US" sz="1500" dirty="0" err="1">
+                          <a:effectLst/>
+                          <a:latin typeface="Tahoma" panose="020B0604030504040204" pitchFamily="34" charset="0"/>
+                          <a:ea typeface="Tahoma" panose="020B0604030504040204" pitchFamily="34" charset="0"/>
+                          <a:cs typeface="Tahoma" panose="020B0604030504040204" pitchFamily="34" charset="0"/>
+                        </a:rPr>
+                        <a:t>tốt</a:t>
+                      </a:r>
+                      <a:r>
+                        <a:rPr lang="en-US" sz="1500" dirty="0">
+                          <a:effectLst/>
+                          <a:latin typeface="Tahoma" panose="020B0604030504040204" pitchFamily="34" charset="0"/>
+                          <a:ea typeface="Tahoma" panose="020B0604030504040204" pitchFamily="34" charset="0"/>
+                          <a:cs typeface="Tahoma" panose="020B0604030504040204" pitchFamily="34" charset="0"/>
+                        </a:rPr>
+                        <a:t> </a:t>
+                      </a:r>
+                      <a:r>
+                        <a:rPr lang="en-US" sz="1500" dirty="0" err="1">
+                          <a:effectLst/>
+                          <a:latin typeface="Tahoma" panose="020B0604030504040204" pitchFamily="34" charset="0"/>
+                          <a:ea typeface="Tahoma" panose="020B0604030504040204" pitchFamily="34" charset="0"/>
+                          <a:cs typeface="Tahoma" panose="020B0604030504040204" pitchFamily="34" charset="0"/>
+                        </a:rPr>
+                        <a:t>nhất</a:t>
+                      </a:r>
+                      <a:r>
+                        <a:rPr lang="en-US" sz="1500" dirty="0">
+                          <a:effectLst/>
+                          <a:latin typeface="Tahoma" panose="020B0604030504040204" pitchFamily="34" charset="0"/>
+                          <a:ea typeface="Tahoma" panose="020B0604030504040204" pitchFamily="34" charset="0"/>
+                          <a:cs typeface="Tahoma" panose="020B0604030504040204" pitchFamily="34" charset="0"/>
+                        </a:rPr>
+                        <a:t>: </a:t>
+                      </a:r>
+                      <a:r>
+                        <a:rPr lang="en-US" sz="1500" dirty="0" err="1">
+                          <a:effectLst/>
+                          <a:latin typeface="Tahoma" panose="020B0604030504040204" pitchFamily="34" charset="0"/>
+                          <a:ea typeface="Tahoma" panose="020B0604030504040204" pitchFamily="34" charset="0"/>
+                          <a:cs typeface="Tahoma" panose="020B0604030504040204" pitchFamily="34" charset="0"/>
+                        </a:rPr>
+                        <a:t>XGBoost+GFs</a:t>
+                      </a:r>
+                      <a:r>
+                        <a:rPr lang="en-US" sz="1500" dirty="0">
+                          <a:effectLst/>
+                          <a:latin typeface="Tahoma" panose="020B0604030504040204" pitchFamily="34" charset="0"/>
+                          <a:ea typeface="Tahoma" panose="020B0604030504040204" pitchFamily="34" charset="0"/>
+                          <a:cs typeface="Tahoma" panose="020B0604030504040204" pitchFamily="34" charset="0"/>
+                        </a:rPr>
+                        <a:t>)</a:t>
+                      </a:r>
+                    </a:p>
+                  </a:txBody>
+                  <a:tcPr marL="40591" marR="40591" marT="24355" marB="24355"/>
+                </a:tc>
+                <a:tc>
+                  <a:txBody>
+                    <a:bodyPr/>
+                    <a:lstStyle/>
+                    <a:p>
+                      <a:pPr marL="0" marR="0" indent="360045" algn="ctr">
+                        <a:lnSpc>
+                          <a:spcPct val="120000"/>
+                        </a:lnSpc>
+                        <a:spcBef>
+                          <a:spcPts val="600"/>
+                        </a:spcBef>
+                        <a:spcAft>
+                          <a:spcPts val="0"/>
+                        </a:spcAft>
+                      </a:pPr>
+                      <a:r>
+                        <a:rPr lang="en-US" sz="1500">
+                          <a:effectLst/>
+                          <a:latin typeface="Tahoma" panose="020B0604030504040204" pitchFamily="34" charset="0"/>
+                          <a:ea typeface="Tahoma" panose="020B0604030504040204" pitchFamily="34" charset="0"/>
+                          <a:cs typeface="Tahoma" panose="020B0604030504040204" pitchFamily="34" charset="0"/>
+                        </a:rPr>
+                        <a:t>Graph Feature Preprocessor[5](2024)</a:t>
+                      </a:r>
+                    </a:p>
+                  </a:txBody>
+                  <a:tcPr marL="40591" marR="40591" marT="24355" marB="24355"/>
+                </a:tc>
+                <a:tc>
+                  <a:txBody>
+                    <a:bodyPr/>
+                    <a:lstStyle/>
+                    <a:p>
+                      <a:pPr marL="0" marR="0" indent="360045" algn="ctr">
+                        <a:lnSpc>
+                          <a:spcPct val="120000"/>
+                        </a:lnSpc>
+                        <a:spcBef>
+                          <a:spcPts val="600"/>
+                        </a:spcBef>
+                        <a:spcAft>
+                          <a:spcPts val="0"/>
+                        </a:spcAft>
+                      </a:pPr>
+                      <a:r>
+                        <a:rPr lang="en-US" sz="1500">
+                          <a:effectLst/>
+                          <a:latin typeface="Tahoma" panose="020B0604030504040204" pitchFamily="34" charset="0"/>
+                          <a:ea typeface="Tahoma" panose="020B0604030504040204" pitchFamily="34" charset="0"/>
+                          <a:cs typeface="Tahoma" panose="020B0604030504040204" pitchFamily="34" charset="0"/>
+                        </a:rPr>
+                        <a:t>64,77 ± 0,47 (f1@0.5)</a:t>
+                      </a:r>
+                    </a:p>
+                  </a:txBody>
+                  <a:tcPr marL="40591" marR="40591" marT="24355" marB="24355"/>
+                </a:tc>
+                <a:tc>
+                  <a:txBody>
+                    <a:bodyPr/>
+                    <a:lstStyle/>
+                    <a:p>
+                      <a:pPr marL="0" marR="0" indent="360045" algn="ctr">
+                        <a:lnSpc>
+                          <a:spcPct val="120000"/>
+                        </a:lnSpc>
+                        <a:spcBef>
+                          <a:spcPts val="600"/>
+                        </a:spcBef>
+                        <a:spcAft>
+                          <a:spcPts val="0"/>
+                        </a:spcAft>
+                      </a:pPr>
+                      <a:r>
+                        <a:rPr lang="en-US" sz="1500">
+                          <a:effectLst/>
+                          <a:latin typeface="Tahoma" panose="020B0604030504040204" pitchFamily="34" charset="0"/>
+                          <a:ea typeface="Tahoma" panose="020B0604030504040204" pitchFamily="34" charset="0"/>
+                          <a:cs typeface="Tahoma" panose="020B0604030504040204" pitchFamily="34" charset="0"/>
+                        </a:rPr>
+                        <a:t>ngưỡng 0,5; chia 60/20/20, cấu hình: hạ tầng IBM cloud</a:t>
+                      </a:r>
+                    </a:p>
+                  </a:txBody>
+                  <a:tcPr marL="40591" marR="40591" marT="24355" marB="24355"/>
+                </a:tc>
+                <a:extLst>
+                  <a:ext uri="{0D108BD9-81ED-4DB2-BD59-A6C34878D82A}">
+                    <a16:rowId xmlns:a16="http://schemas.microsoft.com/office/drawing/2014/main" val="4281006500"/>
+                  </a:ext>
+                </a:extLst>
+              </a:tr>
+              <a:tr h="846217">
+                <a:tc>
+                  <a:txBody>
+                    <a:bodyPr/>
+                    <a:lstStyle/>
+                    <a:p>
+                      <a:pPr marL="0" marR="0" indent="360045" algn="ctr">
+                        <a:lnSpc>
+                          <a:spcPct val="120000"/>
+                        </a:lnSpc>
+                        <a:spcBef>
+                          <a:spcPts val="600"/>
+                        </a:spcBef>
+                        <a:spcAft>
+                          <a:spcPts val="0"/>
+                        </a:spcAft>
+                      </a:pPr>
+                      <a:r>
+                        <a:rPr lang="en-US" sz="1500">
+                          <a:effectLst/>
+                          <a:latin typeface="Tahoma" panose="020B0604030504040204" pitchFamily="34" charset="0"/>
+                          <a:ea typeface="Tahoma" panose="020B0604030504040204" pitchFamily="34" charset="0"/>
+                          <a:cs typeface="Tahoma" panose="020B0604030504040204" pitchFamily="34" charset="0"/>
+                        </a:rPr>
+                        <a:t>Hybrid GraphSAGE+XGBoost </a:t>
+                      </a:r>
+                    </a:p>
+                  </a:txBody>
+                  <a:tcPr marL="40591" marR="40591" marT="24355" marB="24355"/>
+                </a:tc>
+                <a:tc>
+                  <a:txBody>
+                    <a:bodyPr/>
+                    <a:lstStyle/>
+                    <a:p>
+                      <a:pPr marL="0" marR="0" indent="360045" algn="ctr">
+                        <a:lnSpc>
+                          <a:spcPct val="120000"/>
+                        </a:lnSpc>
+                        <a:spcBef>
+                          <a:spcPts val="600"/>
+                        </a:spcBef>
+                        <a:spcAft>
+                          <a:spcPts val="0"/>
+                        </a:spcAft>
+                      </a:pPr>
+                      <a:r>
+                        <a:rPr lang="en-US" sz="1500" dirty="0" err="1">
+                          <a:effectLst/>
+                          <a:latin typeface="Tahoma" panose="020B0604030504040204" pitchFamily="34" charset="0"/>
+                          <a:ea typeface="Tahoma" panose="020B0604030504040204" pitchFamily="34" charset="0"/>
+                          <a:cs typeface="Tahoma" panose="020B0604030504040204" pitchFamily="34" charset="0"/>
+                        </a:rPr>
+                        <a:t>Đề</a:t>
+                      </a:r>
+                      <a:r>
+                        <a:rPr lang="en-US" sz="1500" dirty="0">
+                          <a:effectLst/>
+                          <a:latin typeface="Tahoma" panose="020B0604030504040204" pitchFamily="34" charset="0"/>
+                          <a:ea typeface="Tahoma" panose="020B0604030504040204" pitchFamily="34" charset="0"/>
+                          <a:cs typeface="Tahoma" panose="020B0604030504040204" pitchFamily="34" charset="0"/>
+                        </a:rPr>
+                        <a:t> tài </a:t>
+                      </a:r>
+                      <a:r>
+                        <a:rPr lang="en-US" sz="1500" dirty="0" err="1">
+                          <a:effectLst/>
+                          <a:latin typeface="Tahoma" panose="020B0604030504040204" pitchFamily="34" charset="0"/>
+                          <a:ea typeface="Tahoma" panose="020B0604030504040204" pitchFamily="34" charset="0"/>
+                          <a:cs typeface="Tahoma" panose="020B0604030504040204" pitchFamily="34" charset="0"/>
+                        </a:rPr>
+                        <a:t>này</a:t>
+                      </a:r>
+                      <a:endParaRPr lang="en-US" sz="1500" dirty="0">
+                        <a:effectLst/>
+                        <a:latin typeface="Tahoma" panose="020B0604030504040204" pitchFamily="34" charset="0"/>
+                        <a:ea typeface="Tahoma" panose="020B0604030504040204" pitchFamily="34" charset="0"/>
+                        <a:cs typeface="Tahoma" panose="020B0604030504040204" pitchFamily="34" charset="0"/>
+                      </a:endParaRPr>
+                    </a:p>
+                  </a:txBody>
+                  <a:tcPr marL="40591" marR="40591" marT="24355" marB="24355"/>
+                </a:tc>
+                <a:tc>
+                  <a:txBody>
+                    <a:bodyPr/>
+                    <a:lstStyle/>
+                    <a:p>
+                      <a:pPr marL="0" marR="0" indent="360045" algn="ctr">
+                        <a:lnSpc>
+                          <a:spcPct val="120000"/>
+                        </a:lnSpc>
+                        <a:spcBef>
+                          <a:spcPts val="600"/>
+                        </a:spcBef>
+                        <a:spcAft>
+                          <a:spcPts val="0"/>
+                        </a:spcAft>
+                      </a:pPr>
+                      <a:r>
+                        <a:rPr lang="en-US" sz="1500">
+                          <a:effectLst/>
+                          <a:latin typeface="Tahoma" panose="020B0604030504040204" pitchFamily="34" charset="0"/>
+                          <a:ea typeface="Tahoma" panose="020B0604030504040204" pitchFamily="34" charset="0"/>
+                          <a:cs typeface="Tahoma" panose="020B0604030504040204" pitchFamily="34" charset="0"/>
+                        </a:rPr>
+                        <a:t>65,68 ± 0,85 (f1@0,5)</a:t>
+                      </a:r>
+                    </a:p>
+                  </a:txBody>
+                  <a:tcPr marL="40591" marR="40591" marT="24355" marB="24355"/>
+                </a:tc>
+                <a:tc>
+                  <a:txBody>
+                    <a:bodyPr/>
+                    <a:lstStyle/>
+                    <a:p>
+                      <a:pPr marL="0" marR="0" indent="360045" algn="ctr">
+                        <a:lnSpc>
+                          <a:spcPct val="120000"/>
+                        </a:lnSpc>
+                        <a:spcBef>
+                          <a:spcPts val="600"/>
+                        </a:spcBef>
+                        <a:spcAft>
+                          <a:spcPts val="0"/>
+                        </a:spcAft>
+                      </a:pPr>
+                      <a:r>
+                        <a:rPr lang="en-US" sz="1500">
+                          <a:effectLst/>
+                          <a:latin typeface="Tahoma" panose="020B0604030504040204" pitchFamily="34" charset="0"/>
+                          <a:ea typeface="Tahoma" panose="020B0604030504040204" pitchFamily="34" charset="0"/>
+                          <a:cs typeface="Tahoma" panose="020B0604030504040204" pitchFamily="34" charset="0"/>
+                        </a:rPr>
+                        <a:t>ngưỡng tune trên val; chia 60/20/20, cấu hình RTX 2050, VRAM 4GB/GPU T4 x2 </a:t>
+                      </a:r>
+                    </a:p>
+                  </a:txBody>
+                  <a:tcPr marL="40591" marR="40591" marT="24355" marB="24355"/>
+                </a:tc>
+                <a:extLst>
+                  <a:ext uri="{0D108BD9-81ED-4DB2-BD59-A6C34878D82A}">
+                    <a16:rowId xmlns:a16="http://schemas.microsoft.com/office/drawing/2014/main" val="3542177161"/>
+                  </a:ext>
+                </a:extLst>
+              </a:tr>
+              <a:tr h="846217">
+                <a:tc>
+                  <a:txBody>
+                    <a:bodyPr/>
+                    <a:lstStyle/>
+                    <a:p>
+                      <a:pPr marL="0" marR="0" indent="360045" algn="ctr">
+                        <a:lnSpc>
+                          <a:spcPct val="120000"/>
+                        </a:lnSpc>
+                        <a:spcBef>
+                          <a:spcPts val="600"/>
+                        </a:spcBef>
+                        <a:spcAft>
+                          <a:spcPts val="0"/>
+                        </a:spcAft>
+                      </a:pPr>
+                      <a:r>
+                        <a:rPr lang="en-US" sz="1500">
+                          <a:effectLst/>
+                          <a:latin typeface="Tahoma" panose="020B0604030504040204" pitchFamily="34" charset="0"/>
+                          <a:ea typeface="Tahoma" panose="020B0604030504040204" pitchFamily="34" charset="0"/>
+                          <a:cs typeface="Tahoma" panose="020B0604030504040204" pitchFamily="34" charset="0"/>
+                        </a:rPr>
+                        <a:t>XGBoost</a:t>
+                      </a:r>
+                    </a:p>
+                  </a:txBody>
+                  <a:tcPr marL="40591" marR="40591" marT="24355" marB="24355"/>
+                </a:tc>
+                <a:tc>
+                  <a:txBody>
+                    <a:bodyPr/>
+                    <a:lstStyle/>
+                    <a:p>
+                      <a:pPr marL="0" marR="0" indent="360045" algn="ctr">
+                        <a:lnSpc>
+                          <a:spcPct val="120000"/>
+                        </a:lnSpc>
+                        <a:spcBef>
+                          <a:spcPts val="600"/>
+                        </a:spcBef>
+                        <a:spcAft>
+                          <a:spcPts val="0"/>
+                        </a:spcAft>
+                      </a:pPr>
+                      <a:r>
+                        <a:rPr lang="en-US" sz="1500" dirty="0" err="1">
+                          <a:effectLst/>
+                          <a:latin typeface="Tahoma" panose="020B0604030504040204" pitchFamily="34" charset="0"/>
+                          <a:ea typeface="Tahoma" panose="020B0604030504040204" pitchFamily="34" charset="0"/>
+                          <a:cs typeface="Tahoma" panose="020B0604030504040204" pitchFamily="34" charset="0"/>
+                        </a:rPr>
+                        <a:t>Đề</a:t>
+                      </a:r>
+                      <a:r>
+                        <a:rPr lang="en-US" sz="1500" dirty="0">
+                          <a:effectLst/>
+                          <a:latin typeface="Tahoma" panose="020B0604030504040204" pitchFamily="34" charset="0"/>
+                          <a:ea typeface="Tahoma" panose="020B0604030504040204" pitchFamily="34" charset="0"/>
+                          <a:cs typeface="Tahoma" panose="020B0604030504040204" pitchFamily="34" charset="0"/>
+                        </a:rPr>
+                        <a:t> tài </a:t>
+                      </a:r>
+                      <a:r>
+                        <a:rPr lang="en-US" sz="1500" dirty="0" err="1">
+                          <a:effectLst/>
+                          <a:latin typeface="Tahoma" panose="020B0604030504040204" pitchFamily="34" charset="0"/>
+                          <a:ea typeface="Tahoma" panose="020B0604030504040204" pitchFamily="34" charset="0"/>
+                          <a:cs typeface="Tahoma" panose="020B0604030504040204" pitchFamily="34" charset="0"/>
+                        </a:rPr>
+                        <a:t>này</a:t>
+                      </a:r>
+                      <a:endParaRPr lang="en-US" sz="1500" dirty="0">
+                        <a:effectLst/>
+                        <a:latin typeface="Tahoma" panose="020B0604030504040204" pitchFamily="34" charset="0"/>
+                        <a:ea typeface="Tahoma" panose="020B0604030504040204" pitchFamily="34" charset="0"/>
+                        <a:cs typeface="Tahoma" panose="020B0604030504040204" pitchFamily="34" charset="0"/>
+                      </a:endParaRPr>
+                    </a:p>
+                  </a:txBody>
+                  <a:tcPr marL="40591" marR="40591" marT="24355" marB="24355"/>
+                </a:tc>
+                <a:tc>
+                  <a:txBody>
+                    <a:bodyPr/>
+                    <a:lstStyle/>
+                    <a:p>
+                      <a:pPr marL="0" marR="0" indent="360045" algn="ctr">
+                        <a:lnSpc>
+                          <a:spcPct val="120000"/>
+                        </a:lnSpc>
+                        <a:spcBef>
+                          <a:spcPts val="600"/>
+                        </a:spcBef>
+                        <a:spcAft>
+                          <a:spcPts val="0"/>
+                        </a:spcAft>
+                      </a:pPr>
+                      <a:r>
+                        <a:rPr lang="en-US" sz="1500">
+                          <a:effectLst/>
+                          <a:latin typeface="Tahoma" panose="020B0604030504040204" pitchFamily="34" charset="0"/>
+                          <a:ea typeface="Tahoma" panose="020B0604030504040204" pitchFamily="34" charset="0"/>
+                          <a:cs typeface="Tahoma" panose="020B0604030504040204" pitchFamily="34" charset="0"/>
+                        </a:rPr>
+                        <a:t>64,15 ± 5.9 (f1@0,5)</a:t>
+                      </a:r>
+                    </a:p>
+                  </a:txBody>
+                  <a:tcPr marL="40591" marR="40591" marT="24355" marB="24355"/>
+                </a:tc>
+                <a:tc>
+                  <a:txBody>
+                    <a:bodyPr/>
+                    <a:lstStyle/>
+                    <a:p>
+                      <a:pPr marL="0" marR="0" indent="360045" algn="ctr">
+                        <a:lnSpc>
+                          <a:spcPct val="120000"/>
+                        </a:lnSpc>
+                        <a:spcBef>
+                          <a:spcPts val="600"/>
+                        </a:spcBef>
+                        <a:spcAft>
+                          <a:spcPts val="0"/>
+                        </a:spcAft>
+                      </a:pPr>
+                      <a:r>
+                        <a:rPr lang="en-US" sz="1500">
+                          <a:effectLst/>
+                          <a:latin typeface="Tahoma" panose="020B0604030504040204" pitchFamily="34" charset="0"/>
+                          <a:ea typeface="Tahoma" panose="020B0604030504040204" pitchFamily="34" charset="0"/>
+                          <a:cs typeface="Tahoma" panose="020B0604030504040204" pitchFamily="34" charset="0"/>
+                        </a:rPr>
+                        <a:t>ngưỡng tune trên val; chia 60/20/20, cấu hình RTX 2050, VRAM 4GB/GPU T4 x2</a:t>
+                      </a:r>
+                    </a:p>
+                  </a:txBody>
+                  <a:tcPr marL="40591" marR="40591" marT="24355" marB="24355"/>
+                </a:tc>
+                <a:extLst>
+                  <a:ext uri="{0D108BD9-81ED-4DB2-BD59-A6C34878D82A}">
+                    <a16:rowId xmlns:a16="http://schemas.microsoft.com/office/drawing/2014/main" val="1265932514"/>
+                  </a:ext>
+                </a:extLst>
+              </a:tr>
+              <a:tr h="846217">
+                <a:tc>
+                  <a:txBody>
+                    <a:bodyPr/>
+                    <a:lstStyle/>
+                    <a:p>
+                      <a:pPr marL="0" marR="0" indent="360045" algn="ctr">
+                        <a:lnSpc>
+                          <a:spcPct val="120000"/>
+                        </a:lnSpc>
+                        <a:spcBef>
+                          <a:spcPts val="600"/>
+                        </a:spcBef>
+                        <a:spcAft>
+                          <a:spcPts val="0"/>
+                        </a:spcAft>
+                      </a:pPr>
+                      <a:r>
+                        <a:rPr lang="en-US" sz="1500">
+                          <a:effectLst/>
+                          <a:latin typeface="Tahoma" panose="020B0604030504040204" pitchFamily="34" charset="0"/>
+                          <a:ea typeface="Tahoma" panose="020B0604030504040204" pitchFamily="34" charset="0"/>
+                          <a:cs typeface="Tahoma" panose="020B0604030504040204" pitchFamily="34" charset="0"/>
+                        </a:rPr>
+                        <a:t>lightGBM</a:t>
+                      </a:r>
+                    </a:p>
+                  </a:txBody>
+                  <a:tcPr marL="40591" marR="40591" marT="24355" marB="24355"/>
+                </a:tc>
+                <a:tc>
+                  <a:txBody>
+                    <a:bodyPr/>
+                    <a:lstStyle/>
+                    <a:p>
+                      <a:pPr marL="0" marR="0" indent="360045" algn="ctr">
+                        <a:lnSpc>
+                          <a:spcPct val="120000"/>
+                        </a:lnSpc>
+                        <a:spcBef>
+                          <a:spcPts val="600"/>
+                        </a:spcBef>
+                        <a:spcAft>
+                          <a:spcPts val="0"/>
+                        </a:spcAft>
+                      </a:pPr>
+                      <a:r>
+                        <a:rPr lang="en-US" sz="1500">
+                          <a:effectLst/>
+                          <a:latin typeface="Tahoma" panose="020B0604030504040204" pitchFamily="34" charset="0"/>
+                          <a:ea typeface="Tahoma" panose="020B0604030504040204" pitchFamily="34" charset="0"/>
+                          <a:cs typeface="Tahoma" panose="020B0604030504040204" pitchFamily="34" charset="0"/>
+                        </a:rPr>
+                        <a:t>Đề tài này</a:t>
+                      </a:r>
+                    </a:p>
+                  </a:txBody>
+                  <a:tcPr marL="40591" marR="40591" marT="24355" marB="24355"/>
+                </a:tc>
+                <a:tc>
+                  <a:txBody>
+                    <a:bodyPr/>
+                    <a:lstStyle/>
+                    <a:p>
+                      <a:pPr marL="0" marR="0" indent="360045" algn="ctr">
+                        <a:lnSpc>
+                          <a:spcPct val="120000"/>
+                        </a:lnSpc>
+                        <a:spcBef>
+                          <a:spcPts val="600"/>
+                        </a:spcBef>
+                        <a:spcAft>
+                          <a:spcPts val="0"/>
+                        </a:spcAft>
+                      </a:pPr>
+                      <a:r>
+                        <a:rPr lang="en-US" sz="1500" dirty="0">
+                          <a:effectLst/>
+                          <a:latin typeface="Tahoma" panose="020B0604030504040204" pitchFamily="34" charset="0"/>
+                          <a:ea typeface="Tahoma" panose="020B0604030504040204" pitchFamily="34" charset="0"/>
+                          <a:cs typeface="Tahoma" panose="020B0604030504040204" pitchFamily="34" charset="0"/>
+                        </a:rPr>
+                        <a:t>66.31 ± 0.3 (f1@0,5)</a:t>
+                      </a:r>
+                    </a:p>
+                  </a:txBody>
+                  <a:tcPr marL="40591" marR="40591" marT="24355" marB="24355"/>
+                </a:tc>
+                <a:tc>
+                  <a:txBody>
+                    <a:bodyPr/>
+                    <a:lstStyle/>
+                    <a:p>
+                      <a:pPr marL="0" marR="0" indent="360045" algn="ctr">
+                        <a:lnSpc>
+                          <a:spcPct val="120000"/>
+                        </a:lnSpc>
+                        <a:spcBef>
+                          <a:spcPts val="600"/>
+                        </a:spcBef>
+                        <a:spcAft>
+                          <a:spcPts val="0"/>
+                        </a:spcAft>
+                      </a:pPr>
+                      <a:r>
+                        <a:rPr lang="en-US" sz="1500">
+                          <a:effectLst/>
+                          <a:latin typeface="Tahoma" panose="020B0604030504040204" pitchFamily="34" charset="0"/>
+                          <a:ea typeface="Tahoma" panose="020B0604030504040204" pitchFamily="34" charset="0"/>
+                          <a:cs typeface="Tahoma" panose="020B0604030504040204" pitchFamily="34" charset="0"/>
+                        </a:rPr>
+                        <a:t>ngưỡng tune trên val; chia 60/20/20, cấu hình RTX 2050, VRAM 4GB/GPU T4 x2</a:t>
+                      </a:r>
+                    </a:p>
+                  </a:txBody>
+                  <a:tcPr marL="40591" marR="40591" marT="24355" marB="24355"/>
+                </a:tc>
+                <a:extLst>
+                  <a:ext uri="{0D108BD9-81ED-4DB2-BD59-A6C34878D82A}">
+                    <a16:rowId xmlns:a16="http://schemas.microsoft.com/office/drawing/2014/main" val="2150505215"/>
+                  </a:ext>
+                </a:extLst>
+              </a:tr>
+              <a:tr h="846217">
+                <a:tc>
+                  <a:txBody>
+                    <a:bodyPr/>
+                    <a:lstStyle/>
+                    <a:p>
+                      <a:pPr marL="0" marR="0" indent="360045" algn="ctr">
+                        <a:lnSpc>
+                          <a:spcPct val="120000"/>
+                        </a:lnSpc>
+                        <a:spcBef>
+                          <a:spcPts val="600"/>
+                        </a:spcBef>
+                        <a:spcAft>
+                          <a:spcPts val="0"/>
+                        </a:spcAft>
+                      </a:pPr>
+                      <a:r>
+                        <a:rPr lang="en-US" sz="1500">
+                          <a:effectLst/>
+                          <a:latin typeface="Tahoma" panose="020B0604030504040204" pitchFamily="34" charset="0"/>
+                          <a:ea typeface="Tahoma" panose="020B0604030504040204" pitchFamily="34" charset="0"/>
+                          <a:cs typeface="Tahoma" panose="020B0604030504040204" pitchFamily="34" charset="0"/>
+                        </a:rPr>
+                        <a:t>Multi-PNA+EU</a:t>
+                      </a:r>
+                    </a:p>
+                  </a:txBody>
+                  <a:tcPr marL="40591" marR="40591" marT="24355" marB="24355"/>
+                </a:tc>
+                <a:tc>
+                  <a:txBody>
+                    <a:bodyPr/>
+                    <a:lstStyle/>
+                    <a:p>
+                      <a:pPr marL="0" marR="0" indent="360045" algn="ctr">
+                        <a:lnSpc>
+                          <a:spcPct val="120000"/>
+                        </a:lnSpc>
+                        <a:spcBef>
+                          <a:spcPts val="600"/>
+                        </a:spcBef>
+                        <a:spcAft>
+                          <a:spcPts val="0"/>
+                        </a:spcAft>
+                      </a:pPr>
+                      <a:r>
+                        <a:rPr lang="en-US" sz="1500">
+                          <a:effectLst/>
+                          <a:latin typeface="Tahoma" panose="020B0604030504040204" pitchFamily="34" charset="0"/>
+                          <a:ea typeface="Tahoma" panose="020B0604030504040204" pitchFamily="34" charset="0"/>
+                          <a:cs typeface="Tahoma" panose="020B0604030504040204" pitchFamily="34" charset="0"/>
+                        </a:rPr>
+                        <a:t>Provably powerful graph neural netwok[13]</a:t>
+                      </a:r>
+                    </a:p>
+                  </a:txBody>
+                  <a:tcPr marL="40591" marR="40591" marT="24355" marB="24355"/>
+                </a:tc>
+                <a:tc>
+                  <a:txBody>
+                    <a:bodyPr/>
+                    <a:lstStyle/>
+                    <a:p>
+                      <a:pPr marL="0" marR="0" indent="360045" algn="ctr">
+                        <a:lnSpc>
+                          <a:spcPct val="120000"/>
+                        </a:lnSpc>
+                        <a:spcBef>
+                          <a:spcPts val="600"/>
+                        </a:spcBef>
+                        <a:spcAft>
+                          <a:spcPts val="0"/>
+                        </a:spcAft>
+                      </a:pPr>
+                      <a:r>
+                        <a:rPr lang="en-US" sz="1500" dirty="0">
+                          <a:effectLst/>
+                          <a:latin typeface="Tahoma" panose="020B0604030504040204" pitchFamily="34" charset="0"/>
+                          <a:ea typeface="Tahoma" panose="020B0604030504040204" pitchFamily="34" charset="0"/>
+                          <a:cs typeface="Tahoma" panose="020B0604030504040204" pitchFamily="34" charset="0"/>
+                        </a:rPr>
+                        <a:t>68,16 ± 2,65 (f1@0.5)</a:t>
+                      </a:r>
+                    </a:p>
+                  </a:txBody>
+                  <a:tcPr marL="40591" marR="40591" marT="24355" marB="24355"/>
+                </a:tc>
+                <a:tc>
+                  <a:txBody>
+                    <a:bodyPr/>
+                    <a:lstStyle/>
+                    <a:p>
+                      <a:pPr marL="0" marR="0" indent="360045" algn="ctr">
+                        <a:lnSpc>
+                          <a:spcPct val="120000"/>
+                        </a:lnSpc>
+                        <a:spcBef>
+                          <a:spcPts val="600"/>
+                        </a:spcBef>
+                        <a:spcAft>
+                          <a:spcPts val="0"/>
+                        </a:spcAft>
+                      </a:pPr>
+                      <a:r>
+                        <a:rPr lang="en-US" sz="1500" dirty="0" err="1">
+                          <a:effectLst/>
+                          <a:latin typeface="Tahoma" panose="020B0604030504040204" pitchFamily="34" charset="0"/>
+                          <a:ea typeface="Tahoma" panose="020B0604030504040204" pitchFamily="34" charset="0"/>
+                          <a:cs typeface="Tahoma" panose="020B0604030504040204" pitchFamily="34" charset="0"/>
+                        </a:rPr>
+                        <a:t>Ngưỡng</a:t>
+                      </a:r>
+                      <a:r>
+                        <a:rPr lang="en-US" sz="1500" dirty="0">
+                          <a:effectLst/>
+                          <a:latin typeface="Tahoma" panose="020B0604030504040204" pitchFamily="34" charset="0"/>
+                          <a:ea typeface="Tahoma" panose="020B0604030504040204" pitchFamily="34" charset="0"/>
+                          <a:cs typeface="Tahoma" panose="020B0604030504040204" pitchFamily="34" charset="0"/>
+                        </a:rPr>
+                        <a:t> 0.5, chia 60/20/20, </a:t>
+                      </a:r>
+                      <a:r>
+                        <a:rPr lang="en-US" sz="1500" dirty="0" err="1">
+                          <a:effectLst/>
+                          <a:latin typeface="Tahoma" panose="020B0604030504040204" pitchFamily="34" charset="0"/>
+                          <a:ea typeface="Tahoma" panose="020B0604030504040204" pitchFamily="34" charset="0"/>
+                          <a:cs typeface="Tahoma" panose="020B0604030504040204" pitchFamily="34" charset="0"/>
+                        </a:rPr>
+                        <a:t>cấu</a:t>
+                      </a:r>
+                      <a:r>
+                        <a:rPr lang="en-US" sz="1500" dirty="0">
+                          <a:effectLst/>
+                          <a:latin typeface="Tahoma" panose="020B0604030504040204" pitchFamily="34" charset="0"/>
+                          <a:ea typeface="Tahoma" panose="020B0604030504040204" pitchFamily="34" charset="0"/>
+                          <a:cs typeface="Tahoma" panose="020B0604030504040204" pitchFamily="34" charset="0"/>
+                        </a:rPr>
+                        <a:t> </a:t>
+                      </a:r>
+                      <a:r>
+                        <a:rPr lang="en-US" sz="1500" dirty="0" err="1">
+                          <a:effectLst/>
+                          <a:latin typeface="Tahoma" panose="020B0604030504040204" pitchFamily="34" charset="0"/>
+                          <a:ea typeface="Tahoma" panose="020B0604030504040204" pitchFamily="34" charset="0"/>
+                          <a:cs typeface="Tahoma" panose="020B0604030504040204" pitchFamily="34" charset="0"/>
+                        </a:rPr>
+                        <a:t>hình</a:t>
+                      </a:r>
+                      <a:r>
+                        <a:rPr lang="en-US" sz="1500" dirty="0">
+                          <a:effectLst/>
+                          <a:latin typeface="Tahoma" panose="020B0604030504040204" pitchFamily="34" charset="0"/>
+                          <a:ea typeface="Tahoma" panose="020B0604030504040204" pitchFamily="34" charset="0"/>
+                          <a:cs typeface="Tahoma" panose="020B0604030504040204" pitchFamily="34" charset="0"/>
+                        </a:rPr>
+                        <a:t>: Nvidia Tesla V100 GPU)</a:t>
+                      </a:r>
+                    </a:p>
+                  </a:txBody>
+                  <a:tcPr marL="40591" marR="40591" marT="24355" marB="24355"/>
+                </a:tc>
+                <a:extLst>
+                  <a:ext uri="{0D108BD9-81ED-4DB2-BD59-A6C34878D82A}">
+                    <a16:rowId xmlns:a16="http://schemas.microsoft.com/office/drawing/2014/main" val="275374617"/>
+                  </a:ext>
+                </a:extLst>
+              </a:tr>
+              <a:tr h="846217">
+                <a:tc>
+                  <a:txBody>
+                    <a:bodyPr/>
+                    <a:lstStyle/>
+                    <a:p>
+                      <a:pPr marL="0" marR="0" indent="360045" algn="ctr">
+                        <a:lnSpc>
+                          <a:spcPct val="120000"/>
+                        </a:lnSpc>
+                        <a:spcBef>
+                          <a:spcPts val="600"/>
+                        </a:spcBef>
+                        <a:spcAft>
+                          <a:spcPts val="0"/>
+                        </a:spcAft>
+                      </a:pPr>
+                      <a:r>
+                        <a:rPr lang="en-US" sz="1500">
+                          <a:effectLst/>
+                          <a:latin typeface="Tahoma" panose="020B0604030504040204" pitchFamily="34" charset="0"/>
+                          <a:ea typeface="Tahoma" panose="020B0604030504040204" pitchFamily="34" charset="0"/>
+                          <a:cs typeface="Tahoma" panose="020B0604030504040204" pitchFamily="34" charset="0"/>
+                        </a:rPr>
+                        <a:t>ExSTraQt </a:t>
+                      </a:r>
+                    </a:p>
+                  </a:txBody>
+                  <a:tcPr marL="40591" marR="40591" marT="24355" marB="24355"/>
+                </a:tc>
+                <a:tc>
+                  <a:txBody>
+                    <a:bodyPr/>
+                    <a:lstStyle/>
+                    <a:p>
+                      <a:pPr marL="0" marR="0" indent="360045" algn="ctr">
+                        <a:lnSpc>
+                          <a:spcPct val="120000"/>
+                        </a:lnSpc>
+                        <a:spcBef>
+                          <a:spcPts val="600"/>
+                        </a:spcBef>
+                        <a:spcAft>
+                          <a:spcPts val="0"/>
+                        </a:spcAft>
+                      </a:pPr>
+                      <a:r>
+                        <a:rPr lang="en-US" sz="1500">
+                          <a:effectLst/>
+                          <a:latin typeface="Tahoma" panose="020B0604030504040204" pitchFamily="34" charset="0"/>
+                          <a:ea typeface="Tahoma" panose="020B0604030504040204" pitchFamily="34" charset="0"/>
+                          <a:cs typeface="Tahoma" panose="020B0604030504040204" pitchFamily="34" charset="0"/>
+                        </a:rPr>
+                        <a:t>Quasi temporal graph[10](2026)</a:t>
+                      </a:r>
+                    </a:p>
+                  </a:txBody>
+                  <a:tcPr marL="40591" marR="40591" marT="24355" marB="24355"/>
+                </a:tc>
+                <a:tc>
+                  <a:txBody>
+                    <a:bodyPr/>
+                    <a:lstStyle/>
+                    <a:p>
+                      <a:pPr marL="0" marR="0" indent="360045" algn="ctr">
+                        <a:lnSpc>
+                          <a:spcPct val="120000"/>
+                        </a:lnSpc>
+                        <a:spcBef>
+                          <a:spcPts val="600"/>
+                        </a:spcBef>
+                        <a:spcAft>
+                          <a:spcPts val="0"/>
+                        </a:spcAft>
+                      </a:pPr>
+                      <a:r>
+                        <a:rPr lang="en-US" sz="1500">
+                          <a:effectLst/>
+                          <a:latin typeface="Tahoma" panose="020B0604030504040204" pitchFamily="34" charset="0"/>
+                          <a:ea typeface="Tahoma" panose="020B0604030504040204" pitchFamily="34" charset="0"/>
+                          <a:cs typeface="Tahoma" panose="020B0604030504040204" pitchFamily="34" charset="0"/>
+                        </a:rPr>
+                        <a:t>78,90 ± 0,23 (f1@0.5)</a:t>
+                      </a:r>
+                    </a:p>
+                  </a:txBody>
+                  <a:tcPr marL="40591" marR="40591" marT="24355" marB="24355"/>
+                </a:tc>
+                <a:tc>
+                  <a:txBody>
+                    <a:bodyPr/>
+                    <a:lstStyle/>
+                    <a:p>
+                      <a:pPr marL="0" marR="0" indent="360045" algn="ctr">
+                        <a:lnSpc>
+                          <a:spcPct val="120000"/>
+                        </a:lnSpc>
+                        <a:spcBef>
+                          <a:spcPts val="600"/>
+                        </a:spcBef>
+                        <a:spcAft>
+                          <a:spcPts val="0"/>
+                        </a:spcAft>
+                      </a:pPr>
+                      <a:r>
+                        <a:rPr lang="en-US" sz="1500" dirty="0" err="1">
+                          <a:effectLst/>
+                          <a:latin typeface="Tahoma" panose="020B0604030504040204" pitchFamily="34" charset="0"/>
+                          <a:ea typeface="Tahoma" panose="020B0604030504040204" pitchFamily="34" charset="0"/>
+                          <a:cs typeface="Tahoma" panose="020B0604030504040204" pitchFamily="34" charset="0"/>
+                        </a:rPr>
+                        <a:t>ngưỡng</a:t>
+                      </a:r>
+                      <a:r>
+                        <a:rPr lang="en-US" sz="1500" dirty="0">
+                          <a:effectLst/>
+                          <a:latin typeface="Tahoma" panose="020B0604030504040204" pitchFamily="34" charset="0"/>
+                          <a:ea typeface="Tahoma" panose="020B0604030504040204" pitchFamily="34" charset="0"/>
+                          <a:cs typeface="Tahoma" panose="020B0604030504040204" pitchFamily="34" charset="0"/>
+                        </a:rPr>
+                        <a:t> 0,5; chia 60/20/20, </a:t>
+                      </a:r>
+                      <a:r>
+                        <a:rPr lang="en-US" sz="1500" dirty="0" err="1">
+                          <a:effectLst/>
+                          <a:latin typeface="Tahoma" panose="020B0604030504040204" pitchFamily="34" charset="0"/>
+                          <a:ea typeface="Tahoma" panose="020B0604030504040204" pitchFamily="34" charset="0"/>
+                          <a:cs typeface="Tahoma" panose="020B0604030504040204" pitchFamily="34" charset="0"/>
+                        </a:rPr>
+                        <a:t>cấu</a:t>
+                      </a:r>
+                      <a:r>
+                        <a:rPr lang="en-US" sz="1500" dirty="0">
+                          <a:effectLst/>
+                          <a:latin typeface="Tahoma" panose="020B0604030504040204" pitchFamily="34" charset="0"/>
+                          <a:ea typeface="Tahoma" panose="020B0604030504040204" pitchFamily="34" charset="0"/>
+                          <a:cs typeface="Tahoma" panose="020B0604030504040204" pitchFamily="34" charset="0"/>
+                        </a:rPr>
+                        <a:t> </a:t>
+                      </a:r>
+                      <a:r>
+                        <a:rPr lang="en-US" sz="1500" dirty="0" err="1">
+                          <a:effectLst/>
+                          <a:latin typeface="Tahoma" panose="020B0604030504040204" pitchFamily="34" charset="0"/>
+                          <a:ea typeface="Tahoma" panose="020B0604030504040204" pitchFamily="34" charset="0"/>
+                          <a:cs typeface="Tahoma" panose="020B0604030504040204" pitchFamily="34" charset="0"/>
+                        </a:rPr>
+                        <a:t>hình</a:t>
+                      </a:r>
+                      <a:r>
+                        <a:rPr lang="en-US" sz="1500" dirty="0">
+                          <a:effectLst/>
+                          <a:latin typeface="Tahoma" panose="020B0604030504040204" pitchFamily="34" charset="0"/>
+                          <a:ea typeface="Tahoma" panose="020B0604030504040204" pitchFamily="34" charset="0"/>
+                          <a:cs typeface="Tahoma" panose="020B0604030504040204" pitchFamily="34" charset="0"/>
+                        </a:rPr>
+                        <a:t> </a:t>
+                      </a:r>
+                      <a:r>
+                        <a:rPr lang="en-US" sz="1500" dirty="0" err="1">
+                          <a:effectLst/>
+                          <a:latin typeface="Tahoma" panose="020B0604030504040204" pitchFamily="34" charset="0"/>
+                          <a:ea typeface="Tahoma" panose="020B0604030504040204" pitchFamily="34" charset="0"/>
+                          <a:cs typeface="Tahoma" panose="020B0604030504040204" pitchFamily="34" charset="0"/>
+                        </a:rPr>
+                        <a:t>của</a:t>
+                      </a:r>
+                      <a:r>
+                        <a:rPr lang="en-US" sz="1500" dirty="0">
+                          <a:effectLst/>
+                          <a:latin typeface="Tahoma" panose="020B0604030504040204" pitchFamily="34" charset="0"/>
+                          <a:ea typeface="Tahoma" panose="020B0604030504040204" pitchFamily="34" charset="0"/>
+                          <a:cs typeface="Tahoma" panose="020B0604030504040204" pitchFamily="34" charset="0"/>
+                        </a:rPr>
+                        <a:t> laptop </a:t>
+                      </a:r>
+                      <a:r>
+                        <a:rPr lang="en-US" sz="1500" dirty="0" err="1">
+                          <a:effectLst/>
+                          <a:latin typeface="Tahoma" panose="020B0604030504040204" pitchFamily="34" charset="0"/>
+                          <a:ea typeface="Tahoma" panose="020B0604030504040204" pitchFamily="34" charset="0"/>
+                          <a:cs typeface="Tahoma" panose="020B0604030504040204" pitchFamily="34" charset="0"/>
+                        </a:rPr>
+                        <a:t>macbook</a:t>
+                      </a:r>
+                      <a:r>
+                        <a:rPr lang="en-US" sz="1500" dirty="0">
+                          <a:effectLst/>
+                          <a:latin typeface="Tahoma" panose="020B0604030504040204" pitchFamily="34" charset="0"/>
+                          <a:ea typeface="Tahoma" panose="020B0604030504040204" pitchFamily="34" charset="0"/>
+                          <a:cs typeface="Tahoma" panose="020B0604030504040204" pitchFamily="34" charset="0"/>
+                        </a:rPr>
+                        <a:t> m3 pro</a:t>
+                      </a:r>
+                    </a:p>
+                  </a:txBody>
+                  <a:tcPr marL="40591" marR="40591" marT="24355" marB="24355"/>
+                </a:tc>
+                <a:extLst>
+                  <a:ext uri="{0D108BD9-81ED-4DB2-BD59-A6C34878D82A}">
+                    <a16:rowId xmlns:a16="http://schemas.microsoft.com/office/drawing/2014/main" val="1851669879"/>
+                  </a:ext>
+                </a:extLst>
+              </a:tr>
+            </a:tbl>
+          </a:graphicData>
+        </a:graphic>
+      </p:graphicFrame>
+    </p:spTree>
+    <p:extLst>
+      <p:ext uri="{BB962C8B-B14F-4D97-AF65-F5344CB8AC3E}">
+        <p14:creationId xmlns:p14="http://schemas.microsoft.com/office/powerpoint/2010/main" val="4010489084"/>
+      </p:ext>
+    </p:extLst>
+  </p:cSld>
+  <p:clrMapOvr>
+    <a:masterClrMapping/>
+  </p:clrMapOvr>
+</p:sld>
+</file>
+
+<file path=ppt/slides/slide8.xml><?xml version="1.0" encoding="utf-8"?>
+<p:sld xmlns:a="http://schemas.openxmlformats.org/drawingml/2006/main" xmlns:r="http://schemas.openxmlformats.org/officeDocument/2006/relationships" xmlns:p="http://schemas.openxmlformats.org/presentationml/2006/main">
+  <p:cSld>
+    <p:spTree>
+      <p:nvGrpSpPr>
+        <p:cNvPr id="1" name=""/>
+        <p:cNvGrpSpPr/>
+        <p:nvPr/>
+      </p:nvGrpSpPr>
+      <p:grpSpPr>
+        <a:xfrm>
+          <a:off x="0" y="0"/>
+          <a:ext cx="0" cy="0"/>
+          <a:chOff x="0" y="0"/>
+          <a:chExt cx="0" cy="0"/>
+        </a:xfrm>
+      </p:grpSpPr>
+      <p:sp>
+        <p:nvSpPr>
+          <p:cNvPr id="2" name="Title 1">
+            <a:extLst>
+              <a:ext uri="{FF2B5EF4-FFF2-40B4-BE49-F238E27FC236}">
+                <a16:creationId xmlns:a16="http://schemas.microsoft.com/office/drawing/2014/main" id="{6727981F-8DDB-4942-9095-1A301A93096A}"/>
+              </a:ext>
+            </a:extLst>
+          </p:cNvPr>
+          <p:cNvSpPr>
+            <a:spLocks noGrp="1"/>
+          </p:cNvSpPr>
+          <p:nvPr>
+            <p:ph type="ctrTitle"/>
+          </p:nvPr>
+        </p:nvSpPr>
+        <p:spPr/>
+        <p:txBody>
+          <a:bodyPr/>
+          <a:lstStyle/>
+          <a:p>
+            <a:r>
+              <a:rPr lang="en-US"/>
+              <a:t>CÁM ƠN</a:t>
+            </a:r>
+          </a:p>
+        </p:txBody>
+      </p:sp>
+      <p:sp>
+        <p:nvSpPr>
+          <p:cNvPr id="3" name="Subtitle 2">
+            <a:extLst>
+              <a:ext uri="{FF2B5EF4-FFF2-40B4-BE49-F238E27FC236}">
+                <a16:creationId xmlns:a16="http://schemas.microsoft.com/office/drawing/2014/main" id="{E3DE8CBC-CC0F-41DD-9762-03FD26D3B012}"/>
+              </a:ext>
+            </a:extLst>
+          </p:cNvPr>
+          <p:cNvSpPr>
+            <a:spLocks noGrp="1"/>
+          </p:cNvSpPr>
+          <p:nvPr>
+            <p:ph type="subTitle" idx="1"/>
+          </p:nvPr>
+        </p:nvSpPr>
+        <p:spPr/>
+        <p:txBody>
+          <a:bodyPr/>
+          <a:lstStyle/>
+          <a:p>
+            <a:r>
+              <a:rPr lang="en-US"/>
+              <a:t>Thank you</a:t>
+            </a:r>
+          </a:p>
+        </p:txBody>
+      </p:sp>
+    </p:spTree>
+    <p:extLst>
+      <p:ext uri="{BB962C8B-B14F-4D97-AF65-F5344CB8AC3E}">
+        <p14:creationId xmlns:p14="http://schemas.microsoft.com/office/powerpoint/2010/main" val="131648227"/>
+      </p:ext>
+    </p:extLst>
+  </p:cSld>
+  <p:clrMapOvr>
+    <a:masterClrMapping/>
+  </p:clrMapOvr>
+</p:sld>
+</file>
+
+<file path=ppt/slides/slide9.xml><?xml version="1.0" encoding="utf-8"?>
 <p:sld xmlns:a="http://schemas.openxmlformats.org/drawingml/2006/main" xmlns:r="http://schemas.openxmlformats.org/officeDocument/2006/relationships" xmlns:p="http://schemas.openxmlformats.org/presentationml/2006/main">
   <p:cSld>
     <p:spTree>
@@ -41000,352 +42723,6 @@
     <p:extLst>
       <p:ext uri="{BB962C8B-B14F-4D97-AF65-F5344CB8AC3E}">
         <p14:creationId xmlns:p14="http://schemas.microsoft.com/office/powerpoint/2010/main" val="3934037774"/>
-      </p:ext>
-    </p:extLst>
-  </p:cSld>
-  <p:clrMapOvr>
-    <a:masterClrMapping/>
-  </p:clrMapOvr>
-</p:sld>
-</file>
-
-<file path=ppt/slides/slide7.xml><?xml version="1.0" encoding="utf-8"?>
-<p:sld xmlns:a="http://schemas.openxmlformats.org/drawingml/2006/main" xmlns:r="http://schemas.openxmlformats.org/officeDocument/2006/relationships" xmlns:p="http://schemas.openxmlformats.org/presentationml/2006/main">
-  <p:cSld>
-    <p:spTree>
-      <p:nvGrpSpPr>
-        <p:cNvPr id="1" name=""/>
-        <p:cNvGrpSpPr/>
-        <p:nvPr/>
-      </p:nvGrpSpPr>
-      <p:grpSpPr>
-        <a:xfrm>
-          <a:off x="0" y="0"/>
-          <a:ext cx="0" cy="0"/>
-          <a:chOff x="0" y="0"/>
-          <a:chExt cx="0" cy="0"/>
-        </a:xfrm>
-      </p:grpSpPr>
-      <p:sp>
-        <p:nvSpPr>
-          <p:cNvPr id="2" name="Title 1">
-            <a:extLst>
-              <a:ext uri="{FF2B5EF4-FFF2-40B4-BE49-F238E27FC236}">
-                <a16:creationId xmlns:a16="http://schemas.microsoft.com/office/drawing/2014/main" id="{6727981F-8DDB-4942-9095-1A301A93096A}"/>
-              </a:ext>
-            </a:extLst>
-          </p:cNvPr>
-          <p:cNvSpPr>
-            <a:spLocks noGrp="1"/>
-          </p:cNvSpPr>
-          <p:nvPr>
-            <p:ph type="ctrTitle"/>
-          </p:nvPr>
-        </p:nvSpPr>
-        <p:spPr/>
-        <p:txBody>
-          <a:bodyPr/>
-          <a:lstStyle/>
-          <a:p>
-            <a:r>
-              <a:rPr lang="en-US"/>
-              <a:t>CÁM ƠN</a:t>
-            </a:r>
-          </a:p>
-        </p:txBody>
-      </p:sp>
-      <p:sp>
-        <p:nvSpPr>
-          <p:cNvPr id="3" name="Subtitle 2">
-            <a:extLst>
-              <a:ext uri="{FF2B5EF4-FFF2-40B4-BE49-F238E27FC236}">
-                <a16:creationId xmlns:a16="http://schemas.microsoft.com/office/drawing/2014/main" id="{E3DE8CBC-CC0F-41DD-9762-03FD26D3B012}"/>
-              </a:ext>
-            </a:extLst>
-          </p:cNvPr>
-          <p:cNvSpPr>
-            <a:spLocks noGrp="1"/>
-          </p:cNvSpPr>
-          <p:nvPr>
-            <p:ph type="subTitle" idx="1"/>
-          </p:nvPr>
-        </p:nvSpPr>
-        <p:spPr/>
-        <p:txBody>
-          <a:bodyPr/>
-          <a:lstStyle/>
-          <a:p>
-            <a:r>
-              <a:rPr lang="en-US"/>
-              <a:t>Thank you</a:t>
-            </a:r>
-          </a:p>
-        </p:txBody>
-      </p:sp>
-    </p:spTree>
-    <p:extLst>
-      <p:ext uri="{BB962C8B-B14F-4D97-AF65-F5344CB8AC3E}">
-        <p14:creationId xmlns:p14="http://schemas.microsoft.com/office/powerpoint/2010/main" val="131648227"/>
-      </p:ext>
-    </p:extLst>
-  </p:cSld>
-  <p:clrMapOvr>
-    <a:masterClrMapping/>
-  </p:clrMapOvr>
-</p:sld>
-</file>
-
-<file path=ppt/slides/slide8.xml><?xml version="1.0" encoding="utf-8"?>
-<p:sld xmlns:a="http://schemas.openxmlformats.org/drawingml/2006/main" xmlns:r="http://schemas.openxmlformats.org/officeDocument/2006/relationships" xmlns:p="http://schemas.openxmlformats.org/presentationml/2006/main">
-  <p:cSld>
-    <p:spTree>
-      <p:nvGrpSpPr>
-        <p:cNvPr id="1" name=""/>
-        <p:cNvGrpSpPr/>
-        <p:nvPr/>
-      </p:nvGrpSpPr>
-      <p:grpSpPr>
-        <a:xfrm>
-          <a:off x="0" y="0"/>
-          <a:ext cx="0" cy="0"/>
-          <a:chOff x="0" y="0"/>
-          <a:chExt cx="0" cy="0"/>
-        </a:xfrm>
-      </p:grpSpPr>
-      <p:sp>
-        <p:nvSpPr>
-          <p:cNvPr id="4" name="Title 3">
-            <a:extLst>
-              <a:ext uri="{FF2B5EF4-FFF2-40B4-BE49-F238E27FC236}">
-                <a16:creationId xmlns:a16="http://schemas.microsoft.com/office/drawing/2014/main" id="{1D8EBF9F-2BAC-9E30-FDF7-F09547A89C3A}"/>
-              </a:ext>
-            </a:extLst>
-          </p:cNvPr>
-          <p:cNvSpPr>
-            <a:spLocks noGrp="1"/>
-          </p:cNvSpPr>
-          <p:nvPr>
-            <p:ph type="ctrTitle"/>
-          </p:nvPr>
-        </p:nvSpPr>
-        <p:spPr/>
-        <p:txBody>
-          <a:bodyPr/>
-          <a:lstStyle/>
-          <a:p>
-            <a:endParaRPr lang="en-US"/>
-          </a:p>
-        </p:txBody>
-      </p:sp>
-      <p:sp>
-        <p:nvSpPr>
-          <p:cNvPr id="5" name="Subtitle 4">
-            <a:extLst>
-              <a:ext uri="{FF2B5EF4-FFF2-40B4-BE49-F238E27FC236}">
-                <a16:creationId xmlns:a16="http://schemas.microsoft.com/office/drawing/2014/main" id="{3C4A362E-937E-69DB-344A-0ABB82ECFE06}"/>
-              </a:ext>
-            </a:extLst>
-          </p:cNvPr>
-          <p:cNvSpPr>
-            <a:spLocks noGrp="1"/>
-          </p:cNvSpPr>
-          <p:nvPr>
-            <p:ph type="subTitle" idx="1"/>
-          </p:nvPr>
-        </p:nvSpPr>
-        <p:spPr/>
-        <p:txBody>
-          <a:bodyPr/>
-          <a:lstStyle/>
-          <a:p>
-            <a:endParaRPr lang="en-US"/>
-          </a:p>
-        </p:txBody>
-      </p:sp>
-      <p:sp>
-        <p:nvSpPr>
-          <p:cNvPr id="6" name="Content Placeholder 5">
-            <a:extLst>
-              <a:ext uri="{FF2B5EF4-FFF2-40B4-BE49-F238E27FC236}">
-                <a16:creationId xmlns:a16="http://schemas.microsoft.com/office/drawing/2014/main" id="{DC4D183A-9405-1B18-BAE7-D23D6EF86888}"/>
-              </a:ext>
-            </a:extLst>
-          </p:cNvPr>
-          <p:cNvSpPr>
-            <a:spLocks noGrp="1"/>
-          </p:cNvSpPr>
-          <p:nvPr>
-            <p:ph sz="quarter" idx="12"/>
-          </p:nvPr>
-        </p:nvSpPr>
-        <p:spPr/>
-        <p:txBody>
-          <a:bodyPr/>
-          <a:lstStyle/>
-          <a:p>
-            <a:endParaRPr lang="en-US"/>
-          </a:p>
-        </p:txBody>
-      </p:sp>
-    </p:spTree>
-    <p:extLst>
-      <p:ext uri="{BB962C8B-B14F-4D97-AF65-F5344CB8AC3E}">
-        <p14:creationId xmlns:p14="http://schemas.microsoft.com/office/powerpoint/2010/main" val="293118606"/>
-      </p:ext>
-    </p:extLst>
-  </p:cSld>
-  <p:clrMapOvr>
-    <a:masterClrMapping/>
-  </p:clrMapOvr>
-</p:sld>
-</file>
-
-<file path=ppt/slides/slide9.xml><?xml version="1.0" encoding="utf-8"?>
-<p:sld xmlns:a="http://schemas.openxmlformats.org/drawingml/2006/main" xmlns:r="http://schemas.openxmlformats.org/officeDocument/2006/relationships" xmlns:p="http://schemas.openxmlformats.org/presentationml/2006/main">
-  <p:cSld>
-    <p:spTree>
-      <p:nvGrpSpPr>
-        <p:cNvPr id="1" name=""/>
-        <p:cNvGrpSpPr/>
-        <p:nvPr/>
-      </p:nvGrpSpPr>
-      <p:grpSpPr>
-        <a:xfrm>
-          <a:off x="0" y="0"/>
-          <a:ext cx="0" cy="0"/>
-          <a:chOff x="0" y="0"/>
-          <a:chExt cx="0" cy="0"/>
-        </a:xfrm>
-      </p:grpSpPr>
-      <p:sp>
-        <p:nvSpPr>
-          <p:cNvPr id="2" name="Title 1">
-            <a:extLst>
-              <a:ext uri="{FF2B5EF4-FFF2-40B4-BE49-F238E27FC236}">
-                <a16:creationId xmlns:a16="http://schemas.microsoft.com/office/drawing/2014/main" id="{F13F27A9-2D24-7DD4-711A-8CB14A03C54A}"/>
-              </a:ext>
-            </a:extLst>
-          </p:cNvPr>
-          <p:cNvSpPr>
-            <a:spLocks noGrp="1"/>
-          </p:cNvSpPr>
-          <p:nvPr>
-            <p:ph type="ctrTitle"/>
-          </p:nvPr>
-        </p:nvSpPr>
-        <p:spPr/>
-        <p:txBody>
-          <a:bodyPr/>
-          <a:lstStyle/>
-          <a:p>
-            <a:endParaRPr lang="en-US"/>
-          </a:p>
-        </p:txBody>
-      </p:sp>
-      <p:sp>
-        <p:nvSpPr>
-          <p:cNvPr id="3" name="Subtitle 2">
-            <a:extLst>
-              <a:ext uri="{FF2B5EF4-FFF2-40B4-BE49-F238E27FC236}">
-                <a16:creationId xmlns:a16="http://schemas.microsoft.com/office/drawing/2014/main" id="{37C92DC9-95C6-3F7E-358C-74EA3AFBDE35}"/>
-              </a:ext>
-            </a:extLst>
-          </p:cNvPr>
-          <p:cNvSpPr>
-            <a:spLocks noGrp="1"/>
-          </p:cNvSpPr>
-          <p:nvPr>
-            <p:ph type="subTitle" idx="1"/>
-          </p:nvPr>
-        </p:nvSpPr>
-        <p:spPr/>
-        <p:txBody>
-          <a:bodyPr/>
-          <a:lstStyle/>
-          <a:p>
-            <a:endParaRPr lang="en-US"/>
-          </a:p>
-        </p:txBody>
-      </p:sp>
-      <p:sp>
-        <p:nvSpPr>
-          <p:cNvPr id="4" name="Picture Placeholder 3">
-            <a:extLst>
-              <a:ext uri="{FF2B5EF4-FFF2-40B4-BE49-F238E27FC236}">
-                <a16:creationId xmlns:a16="http://schemas.microsoft.com/office/drawing/2014/main" id="{6F88E9EB-6098-7FA2-3FE3-73843C616046}"/>
-              </a:ext>
-            </a:extLst>
-          </p:cNvPr>
-          <p:cNvSpPr>
-            <a:spLocks noGrp="1"/>
-          </p:cNvSpPr>
-          <p:nvPr>
-            <p:ph type="pic" sz="quarter" idx="12"/>
-          </p:nvPr>
-        </p:nvSpPr>
-        <p:spPr/>
-        <p:txBody>
-          <a:bodyPr/>
-          <a:lstStyle/>
-          <a:p>
-            <a:endParaRPr lang="en-US"/>
-          </a:p>
-        </p:txBody>
-      </p:sp>
-      <p:sp>
-        <p:nvSpPr>
-          <p:cNvPr id="5" name="Picture Placeholder 4">
-            <a:extLst>
-              <a:ext uri="{FF2B5EF4-FFF2-40B4-BE49-F238E27FC236}">
-                <a16:creationId xmlns:a16="http://schemas.microsoft.com/office/drawing/2014/main" id="{07D34A94-EE84-38E4-F7AF-2FE7FC5F9506}"/>
-              </a:ext>
-            </a:extLst>
-          </p:cNvPr>
-          <p:cNvSpPr>
-            <a:spLocks noGrp="1"/>
-          </p:cNvSpPr>
-          <p:nvPr>
-            <p:ph type="pic" sz="quarter" idx="13"/>
-          </p:nvPr>
-        </p:nvSpPr>
-        <p:spPr/>
-        <p:txBody>
-          <a:bodyPr/>
-          <a:lstStyle/>
-          <a:p>
-            <a:endParaRPr lang="en-US"/>
-          </a:p>
-        </p:txBody>
-      </p:sp>
-      <p:sp>
-        <p:nvSpPr>
-          <p:cNvPr id="6" name="Picture Placeholder 5">
-            <a:extLst>
-              <a:ext uri="{FF2B5EF4-FFF2-40B4-BE49-F238E27FC236}">
-                <a16:creationId xmlns:a16="http://schemas.microsoft.com/office/drawing/2014/main" id="{71C5B678-ACF6-FE90-8CFB-3B621A94E63F}"/>
-              </a:ext>
-            </a:extLst>
-          </p:cNvPr>
-          <p:cNvSpPr>
-            <a:spLocks noGrp="1"/>
-          </p:cNvSpPr>
-          <p:nvPr>
-            <p:ph type="pic" sz="quarter" idx="14"/>
-          </p:nvPr>
-        </p:nvSpPr>
-        <p:spPr/>
-        <p:txBody>
-          <a:bodyPr/>
-          <a:lstStyle/>
-          <a:p>
-            <a:endParaRPr lang="en-US"/>
-          </a:p>
-        </p:txBody>
-      </p:sp>
-    </p:spTree>
-    <p:extLst>
-      <p:ext uri="{BB962C8B-B14F-4D97-AF65-F5344CB8AC3E}">
-        <p14:creationId xmlns:p14="http://schemas.microsoft.com/office/powerpoint/2010/main" val="902549347"/>
       </p:ext>
     </p:extLst>
   </p:cSld>
